--- a/slides/ChainLens-BLOCK-AI26-Proposal.pptx
+++ b/slides/ChainLens-BLOCK-AI26-Proposal.pptx
@@ -2,22 +2,22 @@
 <file path=ppt/presentation.xml><?xml version="1.0" encoding="utf-8"?>
 <p:presentation xmlns:p="http://schemas.openxmlformats.org/presentationml/2006/main">
   <p:sldMasterIdLst>
-    <p:sldMasterId xmlns:r="http://schemas.openxmlformats.org/officeDocument/2006/relationships" id="2147483648" r:id="R4852bcfea0f5438a"/>
+    <p:sldMasterId xmlns:r="http://schemas.openxmlformats.org/officeDocument/2006/relationships" id="2147483648" r:id="R3d0f792305a84604"/>
   </p:sldMasterIdLst>
   <p:notesMasterIdLst>
-    <p:notesMasterId xmlns:r="http://schemas.openxmlformats.org/officeDocument/2006/relationships" r:id="Rd0a79a75b051492e"/>
+    <p:notesMasterId xmlns:r="http://schemas.openxmlformats.org/officeDocument/2006/relationships" r:id="R66dc3f46c0004fc5"/>
   </p:notesMasterIdLst>
   <p:sldIdLst>
-    <p:sldId xmlns:r="http://schemas.openxmlformats.org/officeDocument/2006/relationships" id="256" r:id="Ra8dfc14401b74f60"/>
-    <p:sldId xmlns:r="http://schemas.openxmlformats.org/officeDocument/2006/relationships" id="257" r:id="R4aaec17adbda4342"/>
-    <p:sldId xmlns:r="http://schemas.openxmlformats.org/officeDocument/2006/relationships" id="258" r:id="R5a1429863acc4f21"/>
-    <p:sldId xmlns:r="http://schemas.openxmlformats.org/officeDocument/2006/relationships" id="259" r:id="R55d44952a32a4b9e"/>
-    <p:sldId xmlns:r="http://schemas.openxmlformats.org/officeDocument/2006/relationships" id="260" r:id="R57908d03d7c64933"/>
-    <p:sldId xmlns:r="http://schemas.openxmlformats.org/officeDocument/2006/relationships" id="261" r:id="R140db4e39d914f69"/>
-    <p:sldId xmlns:r="http://schemas.openxmlformats.org/officeDocument/2006/relationships" id="262" r:id="R524766d6964644cf"/>
-    <p:sldId xmlns:r="http://schemas.openxmlformats.org/officeDocument/2006/relationships" id="263" r:id="Re8f51293a4604cab"/>
-    <p:sldId xmlns:r="http://schemas.openxmlformats.org/officeDocument/2006/relationships" id="264" r:id="R467c19f22fd44ff5"/>
-    <p:sldId xmlns:r="http://schemas.openxmlformats.org/officeDocument/2006/relationships" id="265" r:id="R70ff161404954e91"/>
+    <p:sldId xmlns:r="http://schemas.openxmlformats.org/officeDocument/2006/relationships" id="256" r:id="R92b67e13bebd40f0"/>
+    <p:sldId xmlns:r="http://schemas.openxmlformats.org/officeDocument/2006/relationships" id="257" r:id="R7ff52a8082444207"/>
+    <p:sldId xmlns:r="http://schemas.openxmlformats.org/officeDocument/2006/relationships" id="258" r:id="R31cd1cb8907f4e7a"/>
+    <p:sldId xmlns:r="http://schemas.openxmlformats.org/officeDocument/2006/relationships" id="259" r:id="Rdae29cebe5ff48f9"/>
+    <p:sldId xmlns:r="http://schemas.openxmlformats.org/officeDocument/2006/relationships" id="260" r:id="R1a9d877d358c45b0"/>
+    <p:sldId xmlns:r="http://schemas.openxmlformats.org/officeDocument/2006/relationships" id="261" r:id="R72bf074124b04a1a"/>
+    <p:sldId xmlns:r="http://schemas.openxmlformats.org/officeDocument/2006/relationships" id="262" r:id="Rf6d7aaf2a3fa4e6e"/>
+    <p:sldId xmlns:r="http://schemas.openxmlformats.org/officeDocument/2006/relationships" id="263" r:id="Rba56d1c5c4524f46"/>
+    <p:sldId xmlns:r="http://schemas.openxmlformats.org/officeDocument/2006/relationships" id="264" r:id="R51fbfced3a204ffc"/>
+    <p:sldId xmlns:r="http://schemas.openxmlformats.org/officeDocument/2006/relationships" id="265" r:id="R2dd2a22aa0734b1a"/>
   </p:sldIdLst>
   <p:sldSz cx="12192000" cy="6858000"/>
   <p:notesSz cx="6858000" cy="9144000"/>
@@ -1149,7 +1149,7 @@
   </p:cSld>
   <p:clrMap bg1="lt1" tx1="dk1" bg2="lt2" tx2="dk2" accent1="accent1" accent2="accent2" accent3="accent3" accent4="accent4" accent5="accent5" accent6="accent6" hlink="hlink" folHlink="folHlink"/>
   <p:sldLayoutIdLst>
-    <p:sldLayoutId xmlns:r="http://schemas.openxmlformats.org/officeDocument/2006/relationships" id="2147483649" r:id="R3b9c1532d552456c"/>
+    <p:sldLayoutId xmlns:r="http://schemas.openxmlformats.org/officeDocument/2006/relationships" id="2147483649" r:id="R2e006090e9f74b21"/>
   </p:sldLayoutIdLst>
   <p:txStyles>
     <p:titleStyle>
@@ -1700,7 +1700,7 @@
           <p:cNvPr id="7" name="text-1">
             <a:extLst xmlns:a="http://schemas.openxmlformats.org/drawingml/2006/main">
               <a:ext uri="{FF2B5EF4-FFF2-40B4-BE49-F238E27FC236}">
-                <a16:creationId xmlns:a16="http://schemas.microsoft.com/office/drawing/2014/main" id="{32DB5454-8C08-46C8-8174-F4A74E9FFCC8}"/>
+                <a16:creationId xmlns:a16="http://schemas.microsoft.com/office/drawing/2014/main" id="{8938F0B8-C3DF-456F-90D0-25A26091DCCA}"/>
               </a:ext>
             </a:extLst>
           </p:cNvPr>
@@ -1757,7 +1757,7 @@
           <p:cNvPr id="2" name="text-2">
             <a:extLst xmlns:a="http://schemas.openxmlformats.org/drawingml/2006/main">
               <a:ext uri="{FF2B5EF4-FFF2-40B4-BE49-F238E27FC236}">
-                <a16:creationId xmlns:a16="http://schemas.microsoft.com/office/drawing/2014/main" id="{8CBDE484-F928-4D30-ABCE-279FDD288282}"/>
+                <a16:creationId xmlns:a16="http://schemas.microsoft.com/office/drawing/2014/main" id="{D1E15BB5-F690-4FE8-9769-FF274C611F9A}"/>
               </a:ext>
             </a:extLst>
           </p:cNvPr>
@@ -1814,7 +1814,7 @@
           <p:cNvPr id="3" name="text-3">
             <a:extLst xmlns:a="http://schemas.openxmlformats.org/drawingml/2006/main">
               <a:ext uri="{FF2B5EF4-FFF2-40B4-BE49-F238E27FC236}">
-                <a16:creationId xmlns:a16="http://schemas.microsoft.com/office/drawing/2014/main" id="{349D009F-83A8-4D81-BFB1-F43D4E470C3B}"/>
+                <a16:creationId xmlns:a16="http://schemas.microsoft.com/office/drawing/2014/main" id="{8CBCE219-4AEF-40FC-83BC-2D15FC31635E}"/>
               </a:ext>
             </a:extLst>
           </p:cNvPr>
@@ -1871,7 +1871,7 @@
           <p:cNvPr id="4" name="text-4">
             <a:extLst xmlns:a="http://schemas.openxmlformats.org/drawingml/2006/main">
               <a:ext uri="{FF2B5EF4-FFF2-40B4-BE49-F238E27FC236}">
-                <a16:creationId xmlns:a16="http://schemas.microsoft.com/office/drawing/2014/main" id="{832A51C8-7C7E-46B1-B930-A54CBE58C12C}"/>
+                <a16:creationId xmlns:a16="http://schemas.microsoft.com/office/drawing/2014/main" id="{52C14827-70AE-444A-BC83-152EE3D6987C}"/>
               </a:ext>
             </a:extLst>
           </p:cNvPr>
@@ -1951,7 +1951,7 @@
           <p:cNvPr id="5" name="text-5">
             <a:extLst xmlns:a="http://schemas.openxmlformats.org/drawingml/2006/main">
               <a:ext uri="{FF2B5EF4-FFF2-40B4-BE49-F238E27FC236}">
-                <a16:creationId xmlns:a16="http://schemas.microsoft.com/office/drawing/2014/main" id="{6593E4B3-160B-4FC8-9BA9-4713E0725083}"/>
+                <a16:creationId xmlns:a16="http://schemas.microsoft.com/office/drawing/2014/main" id="{A5B15234-DA69-4768-A56D-4B6A1F325E82}"/>
               </a:ext>
             </a:extLst>
           </p:cNvPr>
@@ -1998,7 +1998,7 @@
                 <a:ea typeface="Apple SD Gothic Neo"/>
                 <a:cs typeface="Apple SD Gothic Neo"/>
               </a:rPr>
-              <a:t>Chrome MV3 확장 · Ethereum 거래 해석 · Groq 전용 설명 경로</a:t>
+              <a:t>Chrome MV3 확장 · Ethereum 거래 해석 · AI API 설명 경로</a:t>
             </a:r>
           </a:p>
         </p:txBody>
@@ -2008,7 +2008,7 @@
           <p:cNvPr id="6" name="text-6">
             <a:extLst xmlns:a="http://schemas.openxmlformats.org/drawingml/2006/main">
               <a:ext uri="{FF2B5EF4-FFF2-40B4-BE49-F238E27FC236}">
-                <a16:creationId xmlns:a16="http://schemas.microsoft.com/office/drawing/2014/main" id="{C88A71E1-6405-43CA-A778-31D351FFBEA5}"/>
+                <a16:creationId xmlns:a16="http://schemas.microsoft.com/office/drawing/2014/main" id="{639CD528-DCE9-4D99-BB48-75DA7BA05762}"/>
               </a:ext>
             </a:extLst>
           </p:cNvPr>
@@ -2055,7 +2055,7 @@
                 <a:ea typeface="Apple SD Gothic Neo"/>
                 <a:cs typeface="Apple SD Gothic Neo"/>
               </a:rPr>
-              <a:t>2인 개발팀 · 2026-09-12</a:t>
+              <a:t>팀 헐크호건 (아주대학교 박건, 가천대학교 서호)</a:t>
             </a:r>
           </a:p>
         </p:txBody>
@@ -2063,7 +2063,7 @@
     </p:spTree>
     <p:extLst>
       <p:ext uri="{BB962C8B-B14F-4D97-AF65-F5344CB8AC3E}">
-        <p14:creationId xmlns:p14="http://schemas.microsoft.com/office/powerpoint/2010/main" val="300849777"/>
+        <p14:creationId xmlns:p14="http://schemas.microsoft.com/office/powerpoint/2010/main" val="165721257"/>
       </p:ext>
     </p:extLst>
   </p:cSld>
@@ -2094,7 +2094,7 @@
           <p:cNvPr id="10" name="text-75">
             <a:extLst xmlns:a="http://schemas.openxmlformats.org/drawingml/2006/main">
               <a:ext uri="{FF2B5EF4-FFF2-40B4-BE49-F238E27FC236}">
-                <a16:creationId xmlns:a16="http://schemas.microsoft.com/office/drawing/2014/main" id="{E44CEDB4-E3D9-464C-897A-0D6D21831B5A}"/>
+                <a16:creationId xmlns:a16="http://schemas.microsoft.com/office/drawing/2014/main" id="{C998D3D7-F833-4503-B8AC-6C954C942361}"/>
               </a:ext>
             </a:extLst>
           </p:cNvPr>
@@ -2151,7 +2151,7 @@
           <p:cNvPr id="2" name="text-76">
             <a:extLst xmlns:a="http://schemas.openxmlformats.org/drawingml/2006/main">
               <a:ext uri="{FF2B5EF4-FFF2-40B4-BE49-F238E27FC236}">
-                <a16:creationId xmlns:a16="http://schemas.microsoft.com/office/drawing/2014/main" id="{5E476421-B132-4E86-BBCD-1AFC833A3F04}"/>
+                <a16:creationId xmlns:a16="http://schemas.microsoft.com/office/drawing/2014/main" id="{4E511964-7463-41C6-A3D8-2F270247E743}"/>
               </a:ext>
             </a:extLst>
           </p:cNvPr>
@@ -2208,7 +2208,7 @@
           <p:cNvPr id="3" name="">
             <a:extLst xmlns:a="http://schemas.openxmlformats.org/drawingml/2006/main">
               <a:ext uri="{FF2B5EF4-FFF2-40B4-BE49-F238E27FC236}">
-                <a16:creationId xmlns:a16="http://schemas.microsoft.com/office/drawing/2014/main" id="{814D8BAF-93BB-49E0-A8CB-7BC1A5627F81}"/>
+                <a16:creationId xmlns:a16="http://schemas.microsoft.com/office/drawing/2014/main" id="{9274261B-73F2-490B-9805-F6CE6A188A01}"/>
               </a:ext>
             </a:extLst>
           </p:cNvPr>
@@ -2238,7 +2238,7 @@
           <p:cNvPr id="4" name="text-77">
             <a:extLst xmlns:a="http://schemas.openxmlformats.org/drawingml/2006/main">
               <a:ext uri="{FF2B5EF4-FFF2-40B4-BE49-F238E27FC236}">
-                <a16:creationId xmlns:a16="http://schemas.microsoft.com/office/drawing/2014/main" id="{05EB1C4F-ED5A-4570-A34E-CDFF63E50FCC}"/>
+                <a16:creationId xmlns:a16="http://schemas.microsoft.com/office/drawing/2014/main" id="{8A6E9B18-6178-4741-995F-7C7EF81819A0}"/>
               </a:ext>
             </a:extLst>
           </p:cNvPr>
@@ -2295,7 +2295,7 @@
           <p:cNvPr id="5" name="text-78">
             <a:extLst xmlns:a="http://schemas.openxmlformats.org/drawingml/2006/main">
               <a:ext uri="{FF2B5EF4-FFF2-40B4-BE49-F238E27FC236}">
-                <a16:creationId xmlns:a16="http://schemas.microsoft.com/office/drawing/2014/main" id="{03D9F15F-CF16-466B-9DC9-913B3944CA6A}"/>
+                <a16:creationId xmlns:a16="http://schemas.microsoft.com/office/drawing/2014/main" id="{B040BDDE-2290-444C-B03F-1749CA20B770}"/>
               </a:ext>
             </a:extLst>
           </p:cNvPr>
@@ -2752,7 +2752,7 @@
           <p:cNvPr id="7" name="text-79">
             <a:extLst xmlns:a="http://schemas.openxmlformats.org/drawingml/2006/main">
               <a:ext uri="{FF2B5EF4-FFF2-40B4-BE49-F238E27FC236}">
-                <a16:creationId xmlns:a16="http://schemas.microsoft.com/office/drawing/2014/main" id="{8D407E07-026E-44C8-B9B4-E818607A654B}"/>
+                <a16:creationId xmlns:a16="http://schemas.microsoft.com/office/drawing/2014/main" id="{D62A1383-C51D-48C2-9046-8DABF9F96934}"/>
               </a:ext>
             </a:extLst>
           </p:cNvPr>
@@ -2809,7 +2809,7 @@
           <p:cNvPr id="8" name="text-80">
             <a:extLst xmlns:a="http://schemas.openxmlformats.org/drawingml/2006/main">
               <a:ext uri="{FF2B5EF4-FFF2-40B4-BE49-F238E27FC236}">
-                <a16:creationId xmlns:a16="http://schemas.microsoft.com/office/drawing/2014/main" id="{B667A7B7-19C8-4895-B04D-B855F769EE4A}"/>
+                <a16:creationId xmlns:a16="http://schemas.microsoft.com/office/drawing/2014/main" id="{4B1A5F9F-71C8-4278-8DAA-054F7363A7C0}"/>
               </a:ext>
             </a:extLst>
           </p:cNvPr>
@@ -2889,7 +2889,7 @@
           <p:cNvPr id="9" name="text-81">
             <a:extLst xmlns:a="http://schemas.openxmlformats.org/drawingml/2006/main">
               <a:ext uri="{FF2B5EF4-FFF2-40B4-BE49-F238E27FC236}">
-                <a16:creationId xmlns:a16="http://schemas.microsoft.com/office/drawing/2014/main" id="{89920BC0-F15B-4F76-A63B-C06323C47FAA}"/>
+                <a16:creationId xmlns:a16="http://schemas.microsoft.com/office/drawing/2014/main" id="{1882BA75-6A8E-4036-BDAE-52244ACA2196}"/>
               </a:ext>
             </a:extLst>
           </p:cNvPr>
@@ -2944,7 +2944,7 @@
     </p:spTree>
     <p:extLst>
       <p:ext uri="{BB962C8B-B14F-4D97-AF65-F5344CB8AC3E}">
-        <p14:creationId xmlns:p14="http://schemas.microsoft.com/office/powerpoint/2010/main" val="241265088"/>
+        <p14:creationId xmlns:p14="http://schemas.microsoft.com/office/powerpoint/2010/main" val="1944919626"/>
       </p:ext>
     </p:extLst>
   </p:cSld>
@@ -2975,7 +2975,7 @@
           <p:cNvPr id="11" name="text-7">
             <a:extLst xmlns:a="http://schemas.openxmlformats.org/drawingml/2006/main">
               <a:ext uri="{FF2B5EF4-FFF2-40B4-BE49-F238E27FC236}">
-                <a16:creationId xmlns:a16="http://schemas.microsoft.com/office/drawing/2014/main" id="{8B152826-AA40-4D46-A8DF-5418DED9FA33}"/>
+                <a16:creationId xmlns:a16="http://schemas.microsoft.com/office/drawing/2014/main" id="{14D4E2FA-CCDB-4EBF-8A6B-235C85C58082}"/>
               </a:ext>
             </a:extLst>
           </p:cNvPr>
@@ -3032,7 +3032,7 @@
           <p:cNvPr id="2" name="text-8">
             <a:extLst xmlns:a="http://schemas.openxmlformats.org/drawingml/2006/main">
               <a:ext uri="{FF2B5EF4-FFF2-40B4-BE49-F238E27FC236}">
-                <a16:creationId xmlns:a16="http://schemas.microsoft.com/office/drawing/2014/main" id="{5270BE6E-BA69-4A21-8D4A-5CFFD2AF874C}"/>
+                <a16:creationId xmlns:a16="http://schemas.microsoft.com/office/drawing/2014/main" id="{56A19275-623A-4C58-B20F-4186F3FB5A13}"/>
               </a:ext>
             </a:extLst>
           </p:cNvPr>
@@ -3089,7 +3089,7 @@
           <p:cNvPr id="3" name="">
             <a:extLst xmlns:a="http://schemas.openxmlformats.org/drawingml/2006/main">
               <a:ext uri="{FF2B5EF4-FFF2-40B4-BE49-F238E27FC236}">
-                <a16:creationId xmlns:a16="http://schemas.microsoft.com/office/drawing/2014/main" id="{DCABF050-0002-404D-8707-2CFBD25D03CB}"/>
+                <a16:creationId xmlns:a16="http://schemas.microsoft.com/office/drawing/2014/main" id="{303C27F6-987E-4D80-995F-34F8988183AE}"/>
               </a:ext>
             </a:extLst>
           </p:cNvPr>
@@ -3119,7 +3119,7 @@
           <p:cNvPr id="4" name="text-9">
             <a:extLst xmlns:a="http://schemas.openxmlformats.org/drawingml/2006/main">
               <a:ext uri="{FF2B5EF4-FFF2-40B4-BE49-F238E27FC236}">
-                <a16:creationId xmlns:a16="http://schemas.microsoft.com/office/drawing/2014/main" id="{79BFB772-0D41-4F66-831A-CFE889AD6111}"/>
+                <a16:creationId xmlns:a16="http://schemas.microsoft.com/office/drawing/2014/main" id="{22C3ABD4-E4F6-4351-838F-7F32D15A1BDB}"/>
               </a:ext>
             </a:extLst>
           </p:cNvPr>
@@ -3176,7 +3176,7 @@
           <p:cNvPr id="5" name="text-10">
             <a:extLst xmlns:a="http://schemas.openxmlformats.org/drawingml/2006/main">
               <a:ext uri="{FF2B5EF4-FFF2-40B4-BE49-F238E27FC236}">
-                <a16:creationId xmlns:a16="http://schemas.microsoft.com/office/drawing/2014/main" id="{814B1265-14C8-4A13-871F-3E02D6A0F9FE}"/>
+                <a16:creationId xmlns:a16="http://schemas.microsoft.com/office/drawing/2014/main" id="{AE95D44D-E342-4C57-B9AC-2D3850475A6A}"/>
               </a:ext>
             </a:extLst>
           </p:cNvPr>
@@ -3233,7 +3233,7 @@
           <p:cNvPr id="6" name="text-11">
             <a:extLst xmlns:a="http://schemas.openxmlformats.org/drawingml/2006/main">
               <a:ext uri="{FF2B5EF4-FFF2-40B4-BE49-F238E27FC236}">
-                <a16:creationId xmlns:a16="http://schemas.microsoft.com/office/drawing/2014/main" id="{75007E33-366B-4A57-9ABE-6FE2AC05175E}"/>
+                <a16:creationId xmlns:a16="http://schemas.microsoft.com/office/drawing/2014/main" id="{B1A704E5-428C-404F-A70D-5909A23C2028}"/>
               </a:ext>
             </a:extLst>
           </p:cNvPr>
@@ -3313,7 +3313,7 @@
           <p:cNvPr id="7" name="text-12">
             <a:extLst xmlns:a="http://schemas.openxmlformats.org/drawingml/2006/main">
               <a:ext uri="{FF2B5EF4-FFF2-40B4-BE49-F238E27FC236}">
-                <a16:creationId xmlns:a16="http://schemas.microsoft.com/office/drawing/2014/main" id="{FBB481DE-F240-47A3-8252-627AD988E6BF}"/>
+                <a16:creationId xmlns:a16="http://schemas.microsoft.com/office/drawing/2014/main" id="{A144AAF3-F44E-49E4-A7A3-DC7DBCC46868}"/>
               </a:ext>
             </a:extLst>
           </p:cNvPr>
@@ -3631,7 +3631,7 @@
           <p:cNvPr id="9" name="text-13">
             <a:extLst xmlns:a="http://schemas.openxmlformats.org/drawingml/2006/main">
               <a:ext uri="{FF2B5EF4-FFF2-40B4-BE49-F238E27FC236}">
-                <a16:creationId xmlns:a16="http://schemas.microsoft.com/office/drawing/2014/main" id="{755AA340-76E2-4FAA-9554-51F0BE1A177D}"/>
+                <a16:creationId xmlns:a16="http://schemas.microsoft.com/office/drawing/2014/main" id="{B0A633C8-64C2-4388-9298-ACA82BF6E31E}"/>
               </a:ext>
             </a:extLst>
           </p:cNvPr>
@@ -3688,7 +3688,7 @@
           <p:cNvPr id="10" name="text-14">
             <a:extLst xmlns:a="http://schemas.openxmlformats.org/drawingml/2006/main">
               <a:ext uri="{FF2B5EF4-FFF2-40B4-BE49-F238E27FC236}">
-                <a16:creationId xmlns:a16="http://schemas.microsoft.com/office/drawing/2014/main" id="{ED3E8D82-1419-4779-B1F7-ECCD053413C6}"/>
+                <a16:creationId xmlns:a16="http://schemas.microsoft.com/office/drawing/2014/main" id="{E777D291-2694-4153-B5F3-69B80A219BC4}"/>
               </a:ext>
             </a:extLst>
           </p:cNvPr>
@@ -3743,7 +3743,7 @@
     </p:spTree>
     <p:extLst>
       <p:ext uri="{BB962C8B-B14F-4D97-AF65-F5344CB8AC3E}">
-        <p14:creationId xmlns:p14="http://schemas.microsoft.com/office/powerpoint/2010/main" val="1219690748"/>
+        <p14:creationId xmlns:p14="http://schemas.microsoft.com/office/powerpoint/2010/main" val="979711710"/>
       </p:ext>
     </p:extLst>
   </p:cSld>
@@ -3774,7 +3774,7 @@
           <p:cNvPr id="10" name="text-15">
             <a:extLst xmlns:a="http://schemas.openxmlformats.org/drawingml/2006/main">
               <a:ext uri="{FF2B5EF4-FFF2-40B4-BE49-F238E27FC236}">
-                <a16:creationId xmlns:a16="http://schemas.microsoft.com/office/drawing/2014/main" id="{4BA10DA5-AAC8-40F2-9FB4-C1451337F39D}"/>
+                <a16:creationId xmlns:a16="http://schemas.microsoft.com/office/drawing/2014/main" id="{26551F94-C085-4A6F-B243-D6222BAADEC7}"/>
               </a:ext>
             </a:extLst>
           </p:cNvPr>
@@ -3831,7 +3831,7 @@
           <p:cNvPr id="2" name="text-16">
             <a:extLst xmlns:a="http://schemas.openxmlformats.org/drawingml/2006/main">
               <a:ext uri="{FF2B5EF4-FFF2-40B4-BE49-F238E27FC236}">
-                <a16:creationId xmlns:a16="http://schemas.microsoft.com/office/drawing/2014/main" id="{AFD054B2-392B-458A-A79B-E9B70D253FAB}"/>
+                <a16:creationId xmlns:a16="http://schemas.microsoft.com/office/drawing/2014/main" id="{EBDE4A1D-9E55-4BBD-9D53-3CAB13C114F2}"/>
               </a:ext>
             </a:extLst>
           </p:cNvPr>
@@ -3888,7 +3888,7 @@
           <p:cNvPr id="3" name="">
             <a:extLst xmlns:a="http://schemas.openxmlformats.org/drawingml/2006/main">
               <a:ext uri="{FF2B5EF4-FFF2-40B4-BE49-F238E27FC236}">
-                <a16:creationId xmlns:a16="http://schemas.microsoft.com/office/drawing/2014/main" id="{426668AA-3160-4A1E-9179-D92F4AC8A334}"/>
+                <a16:creationId xmlns:a16="http://schemas.microsoft.com/office/drawing/2014/main" id="{814CF951-464E-4BEF-ADD0-4EC095E32732}"/>
               </a:ext>
             </a:extLst>
           </p:cNvPr>
@@ -3918,7 +3918,7 @@
           <p:cNvPr id="4" name="text-17">
             <a:extLst xmlns:a="http://schemas.openxmlformats.org/drawingml/2006/main">
               <a:ext uri="{FF2B5EF4-FFF2-40B4-BE49-F238E27FC236}">
-                <a16:creationId xmlns:a16="http://schemas.microsoft.com/office/drawing/2014/main" id="{C87FF68D-B8F7-4F1D-813B-A25FFBEF5908}"/>
+                <a16:creationId xmlns:a16="http://schemas.microsoft.com/office/drawing/2014/main" id="{2D77B32D-F1EB-41BB-A911-AADD28C4AE8C}"/>
               </a:ext>
             </a:extLst>
           </p:cNvPr>
@@ -3975,7 +3975,7 @@
           <p:cNvPr id="5" name="text-18">
             <a:extLst xmlns:a="http://schemas.openxmlformats.org/drawingml/2006/main">
               <a:ext uri="{FF2B5EF4-FFF2-40B4-BE49-F238E27FC236}">
-                <a16:creationId xmlns:a16="http://schemas.microsoft.com/office/drawing/2014/main" id="{777F414D-7466-4AB6-9573-787BF9872993}"/>
+                <a16:creationId xmlns:a16="http://schemas.microsoft.com/office/drawing/2014/main" id="{C5BE1A09-1B0F-4709-8972-72A0AB185B01}"/>
               </a:ext>
             </a:extLst>
           </p:cNvPr>
@@ -4270,7 +4270,7 @@
           <p:cNvPr id="7" name="text-19">
             <a:extLst xmlns:a="http://schemas.openxmlformats.org/drawingml/2006/main">
               <a:ext uri="{FF2B5EF4-FFF2-40B4-BE49-F238E27FC236}">
-                <a16:creationId xmlns:a16="http://schemas.microsoft.com/office/drawing/2014/main" id="{710876F0-328D-4169-A944-392579A62831}"/>
+                <a16:creationId xmlns:a16="http://schemas.microsoft.com/office/drawing/2014/main" id="{5063C486-60B4-4752-9DC9-E4BF7BEF1319}"/>
               </a:ext>
             </a:extLst>
           </p:cNvPr>
@@ -4327,7 +4327,7 @@
           <p:cNvPr id="8" name="text-20">
             <a:extLst xmlns:a="http://schemas.openxmlformats.org/drawingml/2006/main">
               <a:ext uri="{FF2B5EF4-FFF2-40B4-BE49-F238E27FC236}">
-                <a16:creationId xmlns:a16="http://schemas.microsoft.com/office/drawing/2014/main" id="{79519A98-5395-45AD-9E45-2832C6F3076B}"/>
+                <a16:creationId xmlns:a16="http://schemas.microsoft.com/office/drawing/2014/main" id="{9BDB8167-E2F4-4AF7-A524-388FB6404B45}"/>
               </a:ext>
             </a:extLst>
           </p:cNvPr>
@@ -4407,7 +4407,7 @@
           <p:cNvPr id="9" name="text-21">
             <a:extLst xmlns:a="http://schemas.openxmlformats.org/drawingml/2006/main">
               <a:ext uri="{FF2B5EF4-FFF2-40B4-BE49-F238E27FC236}">
-                <a16:creationId xmlns:a16="http://schemas.microsoft.com/office/drawing/2014/main" id="{319C9456-6FD2-4EE2-B7B1-BF2E97CC39C1}"/>
+                <a16:creationId xmlns:a16="http://schemas.microsoft.com/office/drawing/2014/main" id="{7B5AFEFE-9601-430F-AFCA-F2953964A334}"/>
               </a:ext>
             </a:extLst>
           </p:cNvPr>
@@ -4508,7 +4508,7 @@
     </p:spTree>
     <p:extLst>
       <p:ext uri="{BB962C8B-B14F-4D97-AF65-F5344CB8AC3E}">
-        <p14:creationId xmlns:p14="http://schemas.microsoft.com/office/powerpoint/2010/main" val="1008629450"/>
+        <p14:creationId xmlns:p14="http://schemas.microsoft.com/office/powerpoint/2010/main" val="708573235"/>
       </p:ext>
     </p:extLst>
   </p:cSld>
@@ -4539,7 +4539,7 @@
           <p:cNvPr id="18" name="text-22">
             <a:extLst xmlns:a="http://schemas.openxmlformats.org/drawingml/2006/main">
               <a:ext uri="{FF2B5EF4-FFF2-40B4-BE49-F238E27FC236}">
-                <a16:creationId xmlns:a16="http://schemas.microsoft.com/office/drawing/2014/main" id="{BB352260-FD1A-4080-B7C4-017500B1E382}"/>
+                <a16:creationId xmlns:a16="http://schemas.microsoft.com/office/drawing/2014/main" id="{60A17B9C-FC91-49FD-B27B-A406A89CDE15}"/>
               </a:ext>
             </a:extLst>
           </p:cNvPr>
@@ -4596,7 +4596,7 @@
           <p:cNvPr id="2" name="text-23">
             <a:extLst xmlns:a="http://schemas.openxmlformats.org/drawingml/2006/main">
               <a:ext uri="{FF2B5EF4-FFF2-40B4-BE49-F238E27FC236}">
-                <a16:creationId xmlns:a16="http://schemas.microsoft.com/office/drawing/2014/main" id="{5211F680-B3BC-43E9-9BCC-45E2D309A0C8}"/>
+                <a16:creationId xmlns:a16="http://schemas.microsoft.com/office/drawing/2014/main" id="{71708588-AD12-4D93-9AFC-957B26EBCAF5}"/>
               </a:ext>
             </a:extLst>
           </p:cNvPr>
@@ -4653,7 +4653,7 @@
           <p:cNvPr id="3" name="">
             <a:extLst xmlns:a="http://schemas.openxmlformats.org/drawingml/2006/main">
               <a:ext uri="{FF2B5EF4-FFF2-40B4-BE49-F238E27FC236}">
-                <a16:creationId xmlns:a16="http://schemas.microsoft.com/office/drawing/2014/main" id="{28EA7265-F955-4B9E-A8FC-3F055FFF17D7}"/>
+                <a16:creationId xmlns:a16="http://schemas.microsoft.com/office/drawing/2014/main" id="{A20D4C32-A10A-48D9-B0E8-598FE698A777}"/>
               </a:ext>
             </a:extLst>
           </p:cNvPr>
@@ -4683,7 +4683,7 @@
           <p:cNvPr id="4" name="text-24">
             <a:extLst xmlns:a="http://schemas.openxmlformats.org/drawingml/2006/main">
               <a:ext uri="{FF2B5EF4-FFF2-40B4-BE49-F238E27FC236}">
-                <a16:creationId xmlns:a16="http://schemas.microsoft.com/office/drawing/2014/main" id="{371EFBD5-1242-40D4-849A-00676F74F7B4}"/>
+                <a16:creationId xmlns:a16="http://schemas.microsoft.com/office/drawing/2014/main" id="{4BA5A2E1-0269-4B4F-B737-2F0DEED77BDA}"/>
               </a:ext>
             </a:extLst>
           </p:cNvPr>
@@ -4740,7 +4740,7 @@
           <p:cNvPr id="5" name="text-25">
             <a:extLst xmlns:a="http://schemas.openxmlformats.org/drawingml/2006/main">
               <a:ext uri="{FF2B5EF4-FFF2-40B4-BE49-F238E27FC236}">
-                <a16:creationId xmlns:a16="http://schemas.microsoft.com/office/drawing/2014/main" id="{2E547FF0-4512-48E8-B806-95FBCAA81BEE}"/>
+                <a16:creationId xmlns:a16="http://schemas.microsoft.com/office/drawing/2014/main" id="{FF02586C-81DF-438D-889A-F8BDDFA7D418}"/>
               </a:ext>
             </a:extLst>
           </p:cNvPr>
@@ -4801,7 +4801,7 @@
           <p:nvPr/>
         </p:nvPicPr>
         <p:blipFill>
-          <a:blip xmlns:r="http://schemas.openxmlformats.org/officeDocument/2006/relationships" xmlns:a="http://schemas.openxmlformats.org/drawingml/2006/main" r:embed="R0b13db88611045cd"/>
+          <a:blip xmlns:r="http://schemas.openxmlformats.org/officeDocument/2006/relationships" xmlns:a="http://schemas.openxmlformats.org/drawingml/2006/main" r:embed="Ra9260f33c41b4168"/>
           <a:srcRect xmlns:a="http://schemas.openxmlformats.org/drawingml/2006/main" l="77" t="0" r="77" b="0"/>
           <a:stretch xmlns:a="http://schemas.openxmlformats.org/drawingml/2006/main">
             <a:fillRect l="0" t="0" r="0" b="0"/>
@@ -4822,7 +4822,7 @@
           <p:cNvPr id="7" name="text-26">
             <a:extLst xmlns:a="http://schemas.openxmlformats.org/drawingml/2006/main">
               <a:ext uri="{FF2B5EF4-FFF2-40B4-BE49-F238E27FC236}">
-                <a16:creationId xmlns:a16="http://schemas.microsoft.com/office/drawing/2014/main" id="{B28326ED-FCCA-498C-9F6A-A3B9BCF85130}"/>
+                <a16:creationId xmlns:a16="http://schemas.microsoft.com/office/drawing/2014/main" id="{116E48BB-077C-4C2E-B97D-E1550FDE98F5}"/>
               </a:ext>
             </a:extLst>
           </p:cNvPr>
@@ -4879,7 +4879,7 @@
           <p:cNvPr id="8" name="text-27">
             <a:extLst xmlns:a="http://schemas.openxmlformats.org/drawingml/2006/main">
               <a:ext uri="{FF2B5EF4-FFF2-40B4-BE49-F238E27FC236}">
-                <a16:creationId xmlns:a16="http://schemas.microsoft.com/office/drawing/2014/main" id="{7BD98AA2-B9CF-48EA-943B-7B77005D1D20}"/>
+                <a16:creationId xmlns:a16="http://schemas.microsoft.com/office/drawing/2014/main" id="{6406B18C-D583-429C-96F7-330D1041D1FB}"/>
               </a:ext>
             </a:extLst>
           </p:cNvPr>
@@ -4936,7 +4936,7 @@
           <p:cNvPr id="9" name="node-28">
             <a:extLst xmlns:a="http://schemas.openxmlformats.org/drawingml/2006/main">
               <a:ext uri="{FF2B5EF4-FFF2-40B4-BE49-F238E27FC236}">
-                <a16:creationId xmlns:a16="http://schemas.microsoft.com/office/drawing/2014/main" id="{99A13E73-3AF0-45FC-A639-577B91A9B8E6}"/>
+                <a16:creationId xmlns:a16="http://schemas.microsoft.com/office/drawing/2014/main" id="{02A7E981-2BB2-4068-9AA6-A30629439644}"/>
               </a:ext>
             </a:extLst>
           </p:cNvPr>
@@ -5020,7 +5020,7 @@
           <p:cNvPr id="10" name="node-29">
             <a:extLst xmlns:a="http://schemas.openxmlformats.org/drawingml/2006/main">
               <a:ext uri="{FF2B5EF4-FFF2-40B4-BE49-F238E27FC236}">
-                <a16:creationId xmlns:a16="http://schemas.microsoft.com/office/drawing/2014/main" id="{7BEF26A6-3459-48C2-B97E-047144A2E594}"/>
+                <a16:creationId xmlns:a16="http://schemas.microsoft.com/office/drawing/2014/main" id="{7F559502-552F-4A8C-B5AC-E561CAD61C93}"/>
               </a:ext>
             </a:extLst>
           </p:cNvPr>
@@ -5104,7 +5104,7 @@
           <p:cNvPr id="11" name="node-30">
             <a:extLst xmlns:a="http://schemas.openxmlformats.org/drawingml/2006/main">
               <a:ext uri="{FF2B5EF4-FFF2-40B4-BE49-F238E27FC236}">
-                <a16:creationId xmlns:a16="http://schemas.microsoft.com/office/drawing/2014/main" id="{CEFE3D28-0890-480F-9E8E-1E6088FB5E04}"/>
+                <a16:creationId xmlns:a16="http://schemas.microsoft.com/office/drawing/2014/main" id="{8F46939B-22A0-4B0C-B63C-A8583CF30AFD}"/>
               </a:ext>
             </a:extLst>
           </p:cNvPr>
@@ -5211,7 +5211,7 @@
           <p:cNvPr id="12" name="node-31">
             <a:extLst xmlns:a="http://schemas.openxmlformats.org/drawingml/2006/main">
               <a:ext uri="{FF2B5EF4-FFF2-40B4-BE49-F238E27FC236}">
-                <a16:creationId xmlns:a16="http://schemas.microsoft.com/office/drawing/2014/main" id="{4BE7B9CF-BF85-4670-8690-9D89DA4A55EA}"/>
+                <a16:creationId xmlns:a16="http://schemas.microsoft.com/office/drawing/2014/main" id="{1AE05503-C1B7-451F-8F7D-DA06F69FBD5D}"/>
               </a:ext>
             </a:extLst>
           </p:cNvPr>
@@ -5393,7 +5393,7 @@
           <p:cNvPr id="16" name="text-32">
             <a:extLst xmlns:a="http://schemas.openxmlformats.org/drawingml/2006/main">
               <a:ext uri="{FF2B5EF4-FFF2-40B4-BE49-F238E27FC236}">
-                <a16:creationId xmlns:a16="http://schemas.microsoft.com/office/drawing/2014/main" id="{2179D64C-D302-4DE0-9B8E-69084960EBFA}"/>
+                <a16:creationId xmlns:a16="http://schemas.microsoft.com/office/drawing/2014/main" id="{1CDE1377-3696-4886-994C-239F9B672410}"/>
               </a:ext>
             </a:extLst>
           </p:cNvPr>
@@ -5496,7 +5496,7 @@
           <p:cNvPr id="17" name="text-33">
             <a:extLst xmlns:a="http://schemas.openxmlformats.org/drawingml/2006/main">
               <a:ext uri="{FF2B5EF4-FFF2-40B4-BE49-F238E27FC236}">
-                <a16:creationId xmlns:a16="http://schemas.microsoft.com/office/drawing/2014/main" id="{A59ED820-8D2B-4382-8652-65585879CB83}"/>
+                <a16:creationId xmlns:a16="http://schemas.microsoft.com/office/drawing/2014/main" id="{8C8AA2B4-DD25-430A-A867-5D36CAAAFBF6}"/>
               </a:ext>
             </a:extLst>
           </p:cNvPr>
@@ -5551,7 +5551,7 @@
     </p:spTree>
     <p:extLst>
       <p:ext uri="{BB962C8B-B14F-4D97-AF65-F5344CB8AC3E}">
-        <p14:creationId xmlns:p14="http://schemas.microsoft.com/office/powerpoint/2010/main" val="1950495232"/>
+        <p14:creationId xmlns:p14="http://schemas.microsoft.com/office/powerpoint/2010/main" val="331355143"/>
       </p:ext>
     </p:extLst>
   </p:cSld>
@@ -5582,7 +5582,7 @@
           <p:cNvPr id="9" name="text-34">
             <a:extLst xmlns:a="http://schemas.openxmlformats.org/drawingml/2006/main">
               <a:ext uri="{FF2B5EF4-FFF2-40B4-BE49-F238E27FC236}">
-                <a16:creationId xmlns:a16="http://schemas.microsoft.com/office/drawing/2014/main" id="{019D9175-8A39-4258-8C29-3B9DE0F8C41C}"/>
+                <a16:creationId xmlns:a16="http://schemas.microsoft.com/office/drawing/2014/main" id="{71315F94-B0BB-4A1C-BE81-7D41159634FA}"/>
               </a:ext>
             </a:extLst>
           </p:cNvPr>
@@ -5639,7 +5639,7 @@
           <p:cNvPr id="2" name="text-35">
             <a:extLst xmlns:a="http://schemas.openxmlformats.org/drawingml/2006/main">
               <a:ext uri="{FF2B5EF4-FFF2-40B4-BE49-F238E27FC236}">
-                <a16:creationId xmlns:a16="http://schemas.microsoft.com/office/drawing/2014/main" id="{AE884E12-C8E7-4282-AD3C-9F13450DF00C}"/>
+                <a16:creationId xmlns:a16="http://schemas.microsoft.com/office/drawing/2014/main" id="{88184FA1-9127-47F9-A42D-8FB02156CA5C}"/>
               </a:ext>
             </a:extLst>
           </p:cNvPr>
@@ -5696,7 +5696,7 @@
           <p:cNvPr id="3" name="">
             <a:extLst xmlns:a="http://schemas.openxmlformats.org/drawingml/2006/main">
               <a:ext uri="{FF2B5EF4-FFF2-40B4-BE49-F238E27FC236}">
-                <a16:creationId xmlns:a16="http://schemas.microsoft.com/office/drawing/2014/main" id="{1594AFAF-1933-408A-97B7-D7877B153CD4}"/>
+                <a16:creationId xmlns:a16="http://schemas.microsoft.com/office/drawing/2014/main" id="{52D971D7-7057-4910-8474-4AF956C705DB}"/>
               </a:ext>
             </a:extLst>
           </p:cNvPr>
@@ -5726,7 +5726,7 @@
           <p:cNvPr id="4" name="text-36">
             <a:extLst xmlns:a="http://schemas.openxmlformats.org/drawingml/2006/main">
               <a:ext uri="{FF2B5EF4-FFF2-40B4-BE49-F238E27FC236}">
-                <a16:creationId xmlns:a16="http://schemas.microsoft.com/office/drawing/2014/main" id="{3EF23EC5-2FB1-478B-9E25-79C456CE0896}"/>
+                <a16:creationId xmlns:a16="http://schemas.microsoft.com/office/drawing/2014/main" id="{490ACF52-D310-4CF6-A767-4F0F2D1D18EC}"/>
               </a:ext>
             </a:extLst>
           </p:cNvPr>
@@ -5783,7 +5783,7 @@
           <p:cNvPr id="5" name="text-37">
             <a:extLst xmlns:a="http://schemas.openxmlformats.org/drawingml/2006/main">
               <a:ext uri="{FF2B5EF4-FFF2-40B4-BE49-F238E27FC236}">
-                <a16:creationId xmlns:a16="http://schemas.microsoft.com/office/drawing/2014/main" id="{1FAC446E-B572-43F5-B231-64EBA4EC0DA2}"/>
+                <a16:creationId xmlns:a16="http://schemas.microsoft.com/office/drawing/2014/main" id="{57E8B0CB-B68E-4DB2-A981-5CBD7C2BFC69}"/>
               </a:ext>
             </a:extLst>
           </p:cNvPr>
@@ -6183,7 +6183,7 @@
           <p:cNvPr id="7" name="text-38">
             <a:extLst xmlns:a="http://schemas.openxmlformats.org/drawingml/2006/main">
               <a:ext uri="{FF2B5EF4-FFF2-40B4-BE49-F238E27FC236}">
-                <a16:creationId xmlns:a16="http://schemas.microsoft.com/office/drawing/2014/main" id="{71923CF4-4847-42E7-B605-84D294E4468B}"/>
+                <a16:creationId xmlns:a16="http://schemas.microsoft.com/office/drawing/2014/main" id="{27D7C2B9-401C-4AD4-A59D-2C9824DFBDD9}"/>
               </a:ext>
             </a:extLst>
           </p:cNvPr>
@@ -6240,7 +6240,7 @@
           <p:cNvPr id="8" name="text-39">
             <a:extLst xmlns:a="http://schemas.openxmlformats.org/drawingml/2006/main">
               <a:ext uri="{FF2B5EF4-FFF2-40B4-BE49-F238E27FC236}">
-                <a16:creationId xmlns:a16="http://schemas.microsoft.com/office/drawing/2014/main" id="{FE51E62D-D998-4661-B62B-805ACFCEC26D}"/>
+                <a16:creationId xmlns:a16="http://schemas.microsoft.com/office/drawing/2014/main" id="{0E3861E7-E334-477F-9BB2-B61109E6D72A}"/>
               </a:ext>
             </a:extLst>
           </p:cNvPr>
@@ -6295,7 +6295,7 @@
     </p:spTree>
     <p:extLst>
       <p:ext uri="{BB962C8B-B14F-4D97-AF65-F5344CB8AC3E}">
-        <p14:creationId xmlns:p14="http://schemas.microsoft.com/office/powerpoint/2010/main" val="1368655410"/>
+        <p14:creationId xmlns:p14="http://schemas.microsoft.com/office/powerpoint/2010/main" val="369053783"/>
       </p:ext>
     </p:extLst>
   </p:cSld>
@@ -6326,7 +6326,7 @@
           <p:cNvPr id="18" name="text-40">
             <a:extLst xmlns:a="http://schemas.openxmlformats.org/drawingml/2006/main">
               <a:ext uri="{FF2B5EF4-FFF2-40B4-BE49-F238E27FC236}">
-                <a16:creationId xmlns:a16="http://schemas.microsoft.com/office/drawing/2014/main" id="{829AFAF1-1519-493B-814B-6E58D815C3FB}"/>
+                <a16:creationId xmlns:a16="http://schemas.microsoft.com/office/drawing/2014/main" id="{93D90FDF-FA1D-4710-A34C-1B4F85E3AE96}"/>
               </a:ext>
             </a:extLst>
           </p:cNvPr>
@@ -6383,7 +6383,7 @@
           <p:cNvPr id="2" name="text-41">
             <a:extLst xmlns:a="http://schemas.openxmlformats.org/drawingml/2006/main">
               <a:ext uri="{FF2B5EF4-FFF2-40B4-BE49-F238E27FC236}">
-                <a16:creationId xmlns:a16="http://schemas.microsoft.com/office/drawing/2014/main" id="{4537D3EE-AEE6-4DF6-8F47-6F9BCE13E25D}"/>
+                <a16:creationId xmlns:a16="http://schemas.microsoft.com/office/drawing/2014/main" id="{7958669B-A1B0-4E7A-A99C-95D52F068829}"/>
               </a:ext>
             </a:extLst>
           </p:cNvPr>
@@ -6440,7 +6440,7 @@
           <p:cNvPr id="3" name="">
             <a:extLst xmlns:a="http://schemas.openxmlformats.org/drawingml/2006/main">
               <a:ext uri="{FF2B5EF4-FFF2-40B4-BE49-F238E27FC236}">
-                <a16:creationId xmlns:a16="http://schemas.microsoft.com/office/drawing/2014/main" id="{094D999A-6356-48E3-95A1-192E5C22DE8D}"/>
+                <a16:creationId xmlns:a16="http://schemas.microsoft.com/office/drawing/2014/main" id="{0C258B0F-DFAB-406F-A24C-F4CA05E1A6F3}"/>
               </a:ext>
             </a:extLst>
           </p:cNvPr>
@@ -6470,7 +6470,7 @@
           <p:cNvPr id="4" name="text-42">
             <a:extLst xmlns:a="http://schemas.openxmlformats.org/drawingml/2006/main">
               <a:ext uri="{FF2B5EF4-FFF2-40B4-BE49-F238E27FC236}">
-                <a16:creationId xmlns:a16="http://schemas.microsoft.com/office/drawing/2014/main" id="{6DA85D1A-6347-484D-940D-C1563A347298}"/>
+                <a16:creationId xmlns:a16="http://schemas.microsoft.com/office/drawing/2014/main" id="{FA89A8AB-0E8F-4130-89A0-724BAAAE2371}"/>
               </a:ext>
             </a:extLst>
           </p:cNvPr>
@@ -6527,7 +6527,7 @@
           <p:cNvPr id="5" name="text-43">
             <a:extLst xmlns:a="http://schemas.openxmlformats.org/drawingml/2006/main">
               <a:ext uri="{FF2B5EF4-FFF2-40B4-BE49-F238E27FC236}">
-                <a16:creationId xmlns:a16="http://schemas.microsoft.com/office/drawing/2014/main" id="{67F6B8AA-7F76-4342-8E6E-37A2C1435203}"/>
+                <a16:creationId xmlns:a16="http://schemas.microsoft.com/office/drawing/2014/main" id="{EC61ECD8-5E04-4732-BB21-53F3DF603C24}"/>
               </a:ext>
             </a:extLst>
           </p:cNvPr>
@@ -6584,7 +6584,7 @@
           <p:cNvPr id="6" name="node-44">
             <a:extLst xmlns:a="http://schemas.openxmlformats.org/drawingml/2006/main">
               <a:ext uri="{FF2B5EF4-FFF2-40B4-BE49-F238E27FC236}">
-                <a16:creationId xmlns:a16="http://schemas.microsoft.com/office/drawing/2014/main" id="{BD7A8868-961C-4B6E-9998-8DF15097DC3A}"/>
+                <a16:creationId xmlns:a16="http://schemas.microsoft.com/office/drawing/2014/main" id="{671B8377-8A7C-44FF-8698-BFB30C531D08}"/>
               </a:ext>
             </a:extLst>
           </p:cNvPr>
@@ -6668,7 +6668,7 @@
           <p:cNvPr id="7" name="node-45">
             <a:extLst xmlns:a="http://schemas.openxmlformats.org/drawingml/2006/main">
               <a:ext uri="{FF2B5EF4-FFF2-40B4-BE49-F238E27FC236}">
-                <a16:creationId xmlns:a16="http://schemas.microsoft.com/office/drawing/2014/main" id="{9BEBEF5A-0179-47BA-A602-A136878F47EE}"/>
+                <a16:creationId xmlns:a16="http://schemas.microsoft.com/office/drawing/2014/main" id="{7BCAAAEA-1CDE-4974-B853-EFDEF729D740}"/>
               </a:ext>
             </a:extLst>
           </p:cNvPr>
@@ -6752,7 +6752,7 @@
           <p:cNvPr id="8" name="node-46">
             <a:extLst xmlns:a="http://schemas.openxmlformats.org/drawingml/2006/main">
               <a:ext uri="{FF2B5EF4-FFF2-40B4-BE49-F238E27FC236}">
-                <a16:creationId xmlns:a16="http://schemas.microsoft.com/office/drawing/2014/main" id="{A3509523-157D-4D74-9492-0DDB5021C27C}"/>
+                <a16:creationId xmlns:a16="http://schemas.microsoft.com/office/drawing/2014/main" id="{53FF9727-BFB1-4553-86BC-732D8ADDC332}"/>
               </a:ext>
             </a:extLst>
           </p:cNvPr>
@@ -6836,7 +6836,7 @@
           <p:cNvPr id="9" name="node-47">
             <a:extLst xmlns:a="http://schemas.openxmlformats.org/drawingml/2006/main">
               <a:ext uri="{FF2B5EF4-FFF2-40B4-BE49-F238E27FC236}">
-                <a16:creationId xmlns:a16="http://schemas.microsoft.com/office/drawing/2014/main" id="{2454BE1D-6FD4-419E-A1BC-2B5F39B962AB}"/>
+                <a16:creationId xmlns:a16="http://schemas.microsoft.com/office/drawing/2014/main" id="{56E12569-9A8B-4F4C-A775-7951C0AE2769}"/>
               </a:ext>
             </a:extLst>
           </p:cNvPr>
@@ -6920,7 +6920,7 @@
           <p:cNvPr id="10" name="node-48">
             <a:extLst xmlns:a="http://schemas.openxmlformats.org/drawingml/2006/main">
               <a:ext uri="{FF2B5EF4-FFF2-40B4-BE49-F238E27FC236}">
-                <a16:creationId xmlns:a16="http://schemas.microsoft.com/office/drawing/2014/main" id="{D29D1DBE-7438-4A46-95E5-2B8E2AEC7A8E}"/>
+                <a16:creationId xmlns:a16="http://schemas.microsoft.com/office/drawing/2014/main" id="{AF8E6546-3FA9-4D8D-A5A5-8061C6E8427A}"/>
               </a:ext>
             </a:extLst>
           </p:cNvPr>
@@ -7004,7 +7004,7 @@
           <p:cNvPr id="11" name="node-49">
             <a:extLst xmlns:a="http://schemas.openxmlformats.org/drawingml/2006/main">
               <a:ext uri="{FF2B5EF4-FFF2-40B4-BE49-F238E27FC236}">
-                <a16:creationId xmlns:a16="http://schemas.microsoft.com/office/drawing/2014/main" id="{2AF5A934-12C3-44F4-B302-CE65733ACE08}"/>
+                <a16:creationId xmlns:a16="http://schemas.microsoft.com/office/drawing/2014/main" id="{0738CE40-90BE-4B8E-AEA1-A1A6FC0F88A8}"/>
               </a:ext>
             </a:extLst>
           </p:cNvPr>
@@ -7213,7 +7213,7 @@
           <p:cNvPr id="17" name="text-50">
             <a:extLst xmlns:a="http://schemas.openxmlformats.org/drawingml/2006/main">
               <a:ext uri="{FF2B5EF4-FFF2-40B4-BE49-F238E27FC236}">
-                <a16:creationId xmlns:a16="http://schemas.microsoft.com/office/drawing/2014/main" id="{D8FCA1DD-9112-4B0D-9348-29A038761C12}"/>
+                <a16:creationId xmlns:a16="http://schemas.microsoft.com/office/drawing/2014/main" id="{66C24916-B3E7-4CF7-A015-8154A00DE0D4}"/>
               </a:ext>
             </a:extLst>
           </p:cNvPr>
@@ -7268,7 +7268,7 @@
     </p:spTree>
     <p:extLst>
       <p:ext uri="{BB962C8B-B14F-4D97-AF65-F5344CB8AC3E}">
-        <p14:creationId xmlns:p14="http://schemas.microsoft.com/office/powerpoint/2010/main" val="1433112032"/>
+        <p14:creationId xmlns:p14="http://schemas.microsoft.com/office/powerpoint/2010/main" val="829697646"/>
       </p:ext>
     </p:extLst>
   </p:cSld>
@@ -7299,7 +7299,7 @@
           <p:cNvPr id="14" name="text-51">
             <a:extLst xmlns:a="http://schemas.openxmlformats.org/drawingml/2006/main">
               <a:ext uri="{FF2B5EF4-FFF2-40B4-BE49-F238E27FC236}">
-                <a16:creationId xmlns:a16="http://schemas.microsoft.com/office/drawing/2014/main" id="{B7919AFB-7067-4C9F-8120-E55EF602F64C}"/>
+                <a16:creationId xmlns:a16="http://schemas.microsoft.com/office/drawing/2014/main" id="{4F89C720-223F-4642-9D61-BF5553DA97E6}"/>
               </a:ext>
             </a:extLst>
           </p:cNvPr>
@@ -7356,7 +7356,7 @@
           <p:cNvPr id="2" name="text-52">
             <a:extLst xmlns:a="http://schemas.openxmlformats.org/drawingml/2006/main">
               <a:ext uri="{FF2B5EF4-FFF2-40B4-BE49-F238E27FC236}">
-                <a16:creationId xmlns:a16="http://schemas.microsoft.com/office/drawing/2014/main" id="{0ACC46E5-2E20-423E-AA40-32EFA2B82A7B}"/>
+                <a16:creationId xmlns:a16="http://schemas.microsoft.com/office/drawing/2014/main" id="{7D9F2B74-5397-4B77-8ADB-7D7A02F8B712}"/>
               </a:ext>
             </a:extLst>
           </p:cNvPr>
@@ -7413,7 +7413,7 @@
           <p:cNvPr id="3" name="">
             <a:extLst xmlns:a="http://schemas.openxmlformats.org/drawingml/2006/main">
               <a:ext uri="{FF2B5EF4-FFF2-40B4-BE49-F238E27FC236}">
-                <a16:creationId xmlns:a16="http://schemas.microsoft.com/office/drawing/2014/main" id="{DA648700-30D0-493B-8CAD-A14DDB9C9410}"/>
+                <a16:creationId xmlns:a16="http://schemas.microsoft.com/office/drawing/2014/main" id="{C87438E7-7B99-417B-9384-EF41B20FF0A4}"/>
               </a:ext>
             </a:extLst>
           </p:cNvPr>
@@ -7443,7 +7443,7 @@
           <p:cNvPr id="4" name="text-53">
             <a:extLst xmlns:a="http://schemas.openxmlformats.org/drawingml/2006/main">
               <a:ext uri="{FF2B5EF4-FFF2-40B4-BE49-F238E27FC236}">
-                <a16:creationId xmlns:a16="http://schemas.microsoft.com/office/drawing/2014/main" id="{D7C524BF-D36F-4768-8569-E05211CBA86F}"/>
+                <a16:creationId xmlns:a16="http://schemas.microsoft.com/office/drawing/2014/main" id="{ABF1C3EA-EC6A-4245-9B1A-AEF495508392}"/>
               </a:ext>
             </a:extLst>
           </p:cNvPr>
@@ -7500,7 +7500,7 @@
           <p:cNvPr id="5" name="text-54">
             <a:extLst xmlns:a="http://schemas.openxmlformats.org/drawingml/2006/main">
               <a:ext uri="{FF2B5EF4-FFF2-40B4-BE49-F238E27FC236}">
-                <a16:creationId xmlns:a16="http://schemas.microsoft.com/office/drawing/2014/main" id="{B46A990A-03FE-4244-BBEA-869FFA691B59}"/>
+                <a16:creationId xmlns:a16="http://schemas.microsoft.com/office/drawing/2014/main" id="{238C69D9-02CB-4D08-B99F-8CD6DC89D854}"/>
               </a:ext>
             </a:extLst>
           </p:cNvPr>
@@ -7557,7 +7557,7 @@
           <p:cNvPr id="6" name="">
             <a:extLst xmlns:a="http://schemas.openxmlformats.org/drawingml/2006/main">
               <a:ext uri="{FF2B5EF4-FFF2-40B4-BE49-F238E27FC236}">
-                <a16:creationId xmlns:a16="http://schemas.microsoft.com/office/drawing/2014/main" id="{05F3D8A9-D976-4920-98C7-3C666DAA71CA}"/>
+                <a16:creationId xmlns:a16="http://schemas.microsoft.com/office/drawing/2014/main" id="{BB1C7ED2-68EB-4A43-9A19-69026A011838}"/>
               </a:ext>
             </a:extLst>
           </p:cNvPr>
@@ -7587,7 +7587,7 @@
           <p:cNvPr id="7" name="text-55">
             <a:extLst xmlns:a="http://schemas.openxmlformats.org/drawingml/2006/main">
               <a:ext uri="{FF2B5EF4-FFF2-40B4-BE49-F238E27FC236}">
-                <a16:creationId xmlns:a16="http://schemas.microsoft.com/office/drawing/2014/main" id="{8F8AC20F-3644-42F7-8035-1D5015FD5D07}"/>
+                <a16:creationId xmlns:a16="http://schemas.microsoft.com/office/drawing/2014/main" id="{8D99C85E-032B-4EDB-A22D-3C1768ADC1A5}"/>
               </a:ext>
             </a:extLst>
           </p:cNvPr>
@@ -7644,7 +7644,7 @@
           <p:cNvPr id="8" name="text-56">
             <a:extLst xmlns:a="http://schemas.openxmlformats.org/drawingml/2006/main">
               <a:ext uri="{FF2B5EF4-FFF2-40B4-BE49-F238E27FC236}">
-                <a16:creationId xmlns:a16="http://schemas.microsoft.com/office/drawing/2014/main" id="{BBE2D713-1EAF-46B1-BF16-D4C4B4E6AC84}"/>
+                <a16:creationId xmlns:a16="http://schemas.microsoft.com/office/drawing/2014/main" id="{AA906953-768A-4A1D-B8D4-43FACBC51430}"/>
               </a:ext>
             </a:extLst>
           </p:cNvPr>
@@ -7701,7 +7701,7 @@
           <p:cNvPr id="9" name="text-57">
             <a:extLst xmlns:a="http://schemas.openxmlformats.org/drawingml/2006/main">
               <a:ext uri="{FF2B5EF4-FFF2-40B4-BE49-F238E27FC236}">
-                <a16:creationId xmlns:a16="http://schemas.microsoft.com/office/drawing/2014/main" id="{E7690790-43ED-44E5-ACB5-3F92BF7F3EB1}"/>
+                <a16:creationId xmlns:a16="http://schemas.microsoft.com/office/drawing/2014/main" id="{A76ADC36-8F99-4595-92C9-0F7687AD5439}"/>
               </a:ext>
             </a:extLst>
           </p:cNvPr>
@@ -7827,7 +7827,7 @@
           <p:cNvPr id="10" name="text-58">
             <a:extLst xmlns:a="http://schemas.openxmlformats.org/drawingml/2006/main">
               <a:ext uri="{FF2B5EF4-FFF2-40B4-BE49-F238E27FC236}">
-                <a16:creationId xmlns:a16="http://schemas.microsoft.com/office/drawing/2014/main" id="{ADB1630B-A2C2-43CB-B344-69980F710D1E}"/>
+                <a16:creationId xmlns:a16="http://schemas.microsoft.com/office/drawing/2014/main" id="{8875DA19-AA16-4EC2-9F0A-692B51DE66CF}"/>
               </a:ext>
             </a:extLst>
           </p:cNvPr>
@@ -7953,7 +7953,7 @@
           <p:cNvPr id="11" name="">
             <a:extLst xmlns:a="http://schemas.openxmlformats.org/drawingml/2006/main">
               <a:ext uri="{FF2B5EF4-FFF2-40B4-BE49-F238E27FC236}">
-                <a16:creationId xmlns:a16="http://schemas.microsoft.com/office/drawing/2014/main" id="{7FC2385F-4126-43E9-B597-93430BF53F11}"/>
+                <a16:creationId xmlns:a16="http://schemas.microsoft.com/office/drawing/2014/main" id="{D5447E67-E12A-4812-B3C0-584F0C4E4F12}"/>
               </a:ext>
             </a:extLst>
           </p:cNvPr>
@@ -7983,7 +7983,7 @@
           <p:cNvPr id="12" name="text-59">
             <a:extLst xmlns:a="http://schemas.openxmlformats.org/drawingml/2006/main">
               <a:ext uri="{FF2B5EF4-FFF2-40B4-BE49-F238E27FC236}">
-                <a16:creationId xmlns:a16="http://schemas.microsoft.com/office/drawing/2014/main" id="{F7551FA3-FE9C-40CD-A744-9245B6B4468E}"/>
+                <a16:creationId xmlns:a16="http://schemas.microsoft.com/office/drawing/2014/main" id="{7FCC7861-471F-41F5-A36F-55A9BD329F16}"/>
               </a:ext>
             </a:extLst>
           </p:cNvPr>
@@ -8040,7 +8040,7 @@
           <p:cNvPr id="13" name="text-60">
             <a:extLst xmlns:a="http://schemas.openxmlformats.org/drawingml/2006/main">
               <a:ext uri="{FF2B5EF4-FFF2-40B4-BE49-F238E27FC236}">
-                <a16:creationId xmlns:a16="http://schemas.microsoft.com/office/drawing/2014/main" id="{484F9E2E-D845-4603-86FC-68D76A261801}"/>
+                <a16:creationId xmlns:a16="http://schemas.microsoft.com/office/drawing/2014/main" id="{65D2AD1E-9626-4DAA-B82E-3DE7A80C8518}"/>
               </a:ext>
             </a:extLst>
           </p:cNvPr>
@@ -8118,7 +8118,7 @@
     </p:spTree>
     <p:extLst>
       <p:ext uri="{BB962C8B-B14F-4D97-AF65-F5344CB8AC3E}">
-        <p14:creationId xmlns:p14="http://schemas.microsoft.com/office/powerpoint/2010/main" val="2075352061"/>
+        <p14:creationId xmlns:p14="http://schemas.microsoft.com/office/powerpoint/2010/main" val="1280557009"/>
       </p:ext>
     </p:extLst>
   </p:cSld>
@@ -8149,7 +8149,7 @@
           <p:cNvPr id="10" name="text-61">
             <a:extLst xmlns:a="http://schemas.openxmlformats.org/drawingml/2006/main">
               <a:ext uri="{FF2B5EF4-FFF2-40B4-BE49-F238E27FC236}">
-                <a16:creationId xmlns:a16="http://schemas.microsoft.com/office/drawing/2014/main" id="{D15A5E8B-7EF9-4576-A91E-B035B2C06C0E}"/>
+                <a16:creationId xmlns:a16="http://schemas.microsoft.com/office/drawing/2014/main" id="{D48A1FB8-2AFE-4290-ACCE-57797860D600}"/>
               </a:ext>
             </a:extLst>
           </p:cNvPr>
@@ -8206,7 +8206,7 @@
           <p:cNvPr id="2" name="text-62">
             <a:extLst xmlns:a="http://schemas.openxmlformats.org/drawingml/2006/main">
               <a:ext uri="{FF2B5EF4-FFF2-40B4-BE49-F238E27FC236}">
-                <a16:creationId xmlns:a16="http://schemas.microsoft.com/office/drawing/2014/main" id="{486DCC52-EB17-4DA0-A4DA-CA20D90FEEC2}"/>
+                <a16:creationId xmlns:a16="http://schemas.microsoft.com/office/drawing/2014/main" id="{AD176BB0-727C-4B4F-9BD9-7B718A7BEC8D}"/>
               </a:ext>
             </a:extLst>
           </p:cNvPr>
@@ -8263,7 +8263,7 @@
           <p:cNvPr id="3" name="">
             <a:extLst xmlns:a="http://schemas.openxmlformats.org/drawingml/2006/main">
               <a:ext uri="{FF2B5EF4-FFF2-40B4-BE49-F238E27FC236}">
-                <a16:creationId xmlns:a16="http://schemas.microsoft.com/office/drawing/2014/main" id="{DDB3A196-AF77-4B36-893A-9825EA7A9DB4}"/>
+                <a16:creationId xmlns:a16="http://schemas.microsoft.com/office/drawing/2014/main" id="{D73B496A-BDAC-45EC-A0DA-280254160C13}"/>
               </a:ext>
             </a:extLst>
           </p:cNvPr>
@@ -8293,7 +8293,7 @@
           <p:cNvPr id="4" name="text-63">
             <a:extLst xmlns:a="http://schemas.openxmlformats.org/drawingml/2006/main">
               <a:ext uri="{FF2B5EF4-FFF2-40B4-BE49-F238E27FC236}">
-                <a16:creationId xmlns:a16="http://schemas.microsoft.com/office/drawing/2014/main" id="{B5E1F874-1A7E-48AB-B508-F5FC582B8058}"/>
+                <a16:creationId xmlns:a16="http://schemas.microsoft.com/office/drawing/2014/main" id="{6693D1C8-422C-45E6-B3D7-7150F9FAE192}"/>
               </a:ext>
             </a:extLst>
           </p:cNvPr>
@@ -8350,7 +8350,7 @@
           <p:cNvPr id="5" name="text-64">
             <a:extLst xmlns:a="http://schemas.openxmlformats.org/drawingml/2006/main">
               <a:ext uri="{FF2B5EF4-FFF2-40B4-BE49-F238E27FC236}">
-                <a16:creationId xmlns:a16="http://schemas.microsoft.com/office/drawing/2014/main" id="{9DDF8592-2140-46D4-9EFA-57674C775FAC}"/>
+                <a16:creationId xmlns:a16="http://schemas.microsoft.com/office/drawing/2014/main" id="{DC9C2F3D-D0F8-456C-A085-1F2C3ABCC886}"/>
               </a:ext>
             </a:extLst>
           </p:cNvPr>
@@ -8750,7 +8750,7 @@
           <p:cNvPr id="7" name="text-65">
             <a:extLst xmlns:a="http://schemas.openxmlformats.org/drawingml/2006/main">
               <a:ext uri="{FF2B5EF4-FFF2-40B4-BE49-F238E27FC236}">
-                <a16:creationId xmlns:a16="http://schemas.microsoft.com/office/drawing/2014/main" id="{03486338-9520-4486-B2F4-6A88AEF66216}"/>
+                <a16:creationId xmlns:a16="http://schemas.microsoft.com/office/drawing/2014/main" id="{1E1C49F2-6814-4ED1-986D-6AB21F406A6F}"/>
               </a:ext>
             </a:extLst>
           </p:cNvPr>
@@ -8807,7 +8807,7 @@
           <p:cNvPr id="8" name="text-66">
             <a:extLst xmlns:a="http://schemas.openxmlformats.org/drawingml/2006/main">
               <a:ext uri="{FF2B5EF4-FFF2-40B4-BE49-F238E27FC236}">
-                <a16:creationId xmlns:a16="http://schemas.microsoft.com/office/drawing/2014/main" id="{8128AD68-C380-4018-AB91-AB5E6AE47538}"/>
+                <a16:creationId xmlns:a16="http://schemas.microsoft.com/office/drawing/2014/main" id="{9073D752-EE4C-4116-9FB0-6118BDAC9AD5}"/>
               </a:ext>
             </a:extLst>
           </p:cNvPr>
@@ -8864,7 +8864,7 @@
           <p:cNvPr id="9" name="text-67">
             <a:extLst xmlns:a="http://schemas.openxmlformats.org/drawingml/2006/main">
               <a:ext uri="{FF2B5EF4-FFF2-40B4-BE49-F238E27FC236}">
-                <a16:creationId xmlns:a16="http://schemas.microsoft.com/office/drawing/2014/main" id="{EBEC6A1D-189A-4267-BE53-A7CBC9929F13}"/>
+                <a16:creationId xmlns:a16="http://schemas.microsoft.com/office/drawing/2014/main" id="{F1F5F033-F427-47AA-A674-E8DE23EFAECF}"/>
               </a:ext>
             </a:extLst>
           </p:cNvPr>
@@ -8919,7 +8919,7 @@
     </p:spTree>
     <p:extLst>
       <p:ext uri="{BB962C8B-B14F-4D97-AF65-F5344CB8AC3E}">
-        <p14:creationId xmlns:p14="http://schemas.microsoft.com/office/powerpoint/2010/main" val="1057212451"/>
+        <p14:creationId xmlns:p14="http://schemas.microsoft.com/office/powerpoint/2010/main" val="563326393"/>
       </p:ext>
     </p:extLst>
   </p:cSld>
@@ -8950,7 +8950,7 @@
           <p:cNvPr id="10" name="text-68">
             <a:extLst xmlns:a="http://schemas.openxmlformats.org/drawingml/2006/main">
               <a:ext uri="{FF2B5EF4-FFF2-40B4-BE49-F238E27FC236}">
-                <a16:creationId xmlns:a16="http://schemas.microsoft.com/office/drawing/2014/main" id="{60CE5E5E-1284-49C3-BFAA-5F2832765917}"/>
+                <a16:creationId xmlns:a16="http://schemas.microsoft.com/office/drawing/2014/main" id="{446DD717-5438-43D3-A583-3E6520FC0BD5}"/>
               </a:ext>
             </a:extLst>
           </p:cNvPr>
@@ -9007,7 +9007,7 @@
           <p:cNvPr id="2" name="text-69">
             <a:extLst xmlns:a="http://schemas.openxmlformats.org/drawingml/2006/main">
               <a:ext uri="{FF2B5EF4-FFF2-40B4-BE49-F238E27FC236}">
-                <a16:creationId xmlns:a16="http://schemas.microsoft.com/office/drawing/2014/main" id="{3560E732-EC49-4233-B29B-28A817454D3F}"/>
+                <a16:creationId xmlns:a16="http://schemas.microsoft.com/office/drawing/2014/main" id="{FD717DD2-6798-483F-AB9F-3B7CF35540EF}"/>
               </a:ext>
             </a:extLst>
           </p:cNvPr>
@@ -9064,7 +9064,7 @@
           <p:cNvPr id="3" name="">
             <a:extLst xmlns:a="http://schemas.openxmlformats.org/drawingml/2006/main">
               <a:ext uri="{FF2B5EF4-FFF2-40B4-BE49-F238E27FC236}">
-                <a16:creationId xmlns:a16="http://schemas.microsoft.com/office/drawing/2014/main" id="{6830A928-D97C-42EB-AA1A-7501C86E47C5}"/>
+                <a16:creationId xmlns:a16="http://schemas.microsoft.com/office/drawing/2014/main" id="{6CCDCC7E-9C12-49F8-8C5E-170A8BA9E8FD}"/>
               </a:ext>
             </a:extLst>
           </p:cNvPr>
@@ -9094,7 +9094,7 @@
           <p:cNvPr id="4" name="text-70">
             <a:extLst xmlns:a="http://schemas.openxmlformats.org/drawingml/2006/main">
               <a:ext uri="{FF2B5EF4-FFF2-40B4-BE49-F238E27FC236}">
-                <a16:creationId xmlns:a16="http://schemas.microsoft.com/office/drawing/2014/main" id="{AA623BD1-D30A-4F59-AD5E-AB091319B59D}"/>
+                <a16:creationId xmlns:a16="http://schemas.microsoft.com/office/drawing/2014/main" id="{3BDD2F1C-7169-481D-B9B2-2EBCA9F4D78C}"/>
               </a:ext>
             </a:extLst>
           </p:cNvPr>
@@ -9151,7 +9151,7 @@
           <p:cNvPr id="5" name="text-71">
             <a:extLst xmlns:a="http://schemas.openxmlformats.org/drawingml/2006/main">
               <a:ext uri="{FF2B5EF4-FFF2-40B4-BE49-F238E27FC236}">
-                <a16:creationId xmlns:a16="http://schemas.microsoft.com/office/drawing/2014/main" id="{228A3FF0-2A03-42A5-AAFB-B80C307C304E}"/>
+                <a16:creationId xmlns:a16="http://schemas.microsoft.com/office/drawing/2014/main" id="{D90BEED2-DE5F-4F76-B2D8-E9E24AC678A3}"/>
               </a:ext>
             </a:extLst>
           </p:cNvPr>
@@ -9500,7 +9500,7 @@
           <p:cNvPr id="7" name="text-72">
             <a:extLst xmlns:a="http://schemas.openxmlformats.org/drawingml/2006/main">
               <a:ext uri="{FF2B5EF4-FFF2-40B4-BE49-F238E27FC236}">
-                <a16:creationId xmlns:a16="http://schemas.microsoft.com/office/drawing/2014/main" id="{FDE35FA3-06D5-40DD-BC27-0AC16C1CCBF5}"/>
+                <a16:creationId xmlns:a16="http://schemas.microsoft.com/office/drawing/2014/main" id="{328B0225-DFFD-4F76-95C6-F97DBCF6BCE4}"/>
               </a:ext>
             </a:extLst>
           </p:cNvPr>
@@ -9557,7 +9557,7 @@
           <p:cNvPr id="8" name="text-73">
             <a:extLst xmlns:a="http://schemas.openxmlformats.org/drawingml/2006/main">
               <a:ext uri="{FF2B5EF4-FFF2-40B4-BE49-F238E27FC236}">
-                <a16:creationId xmlns:a16="http://schemas.microsoft.com/office/drawing/2014/main" id="{A339649D-F531-4CCB-8C9D-EDE63A897BB7}"/>
+                <a16:creationId xmlns:a16="http://schemas.microsoft.com/office/drawing/2014/main" id="{1B5EAC3B-9F42-4C79-B64E-3D58280B3E3B}"/>
               </a:ext>
             </a:extLst>
           </p:cNvPr>
@@ -9614,7 +9614,7 @@
           <p:cNvPr id="9" name="text-74">
             <a:extLst xmlns:a="http://schemas.openxmlformats.org/drawingml/2006/main">
               <a:ext uri="{FF2B5EF4-FFF2-40B4-BE49-F238E27FC236}">
-                <a16:creationId xmlns:a16="http://schemas.microsoft.com/office/drawing/2014/main" id="{CEC1B423-5ABB-4941-8EF2-1C2F06E02594}"/>
+                <a16:creationId xmlns:a16="http://schemas.microsoft.com/office/drawing/2014/main" id="{6902AECB-391F-465E-9334-2F2E0CEE997D}"/>
               </a:ext>
             </a:extLst>
           </p:cNvPr>
@@ -9669,7 +9669,7 @@
     </p:spTree>
     <p:extLst>
       <p:ext uri="{BB962C8B-B14F-4D97-AF65-F5344CB8AC3E}">
-        <p14:creationId xmlns:p14="http://schemas.microsoft.com/office/powerpoint/2010/main" val="1362784554"/>
+        <p14:creationId xmlns:p14="http://schemas.microsoft.com/office/powerpoint/2010/main" val="2009366579"/>
       </p:ext>
     </p:extLst>
   </p:cSld>

--- a/slides/ChainLens-BLOCK-AI26-Proposal.pptx
+++ b/slides/ChainLens-BLOCK-AI26-Proposal.pptx
@@ -2,22 +2,22 @@
 <file path=ppt/presentation.xml><?xml version="1.0" encoding="utf-8"?>
 <p:presentation xmlns:p="http://schemas.openxmlformats.org/presentationml/2006/main">
   <p:sldMasterIdLst>
-    <p:sldMasterId xmlns:r="http://schemas.openxmlformats.org/officeDocument/2006/relationships" id="2147483648" r:id="R3d0f792305a84604"/>
+    <p:sldMasterId xmlns:r="http://schemas.openxmlformats.org/officeDocument/2006/relationships" id="2147483648" r:id="R7a6140a8dc9746e9"/>
   </p:sldMasterIdLst>
   <p:notesMasterIdLst>
-    <p:notesMasterId xmlns:r="http://schemas.openxmlformats.org/officeDocument/2006/relationships" r:id="R66dc3f46c0004fc5"/>
+    <p:notesMasterId xmlns:r="http://schemas.openxmlformats.org/officeDocument/2006/relationships" r:id="Ra113519b115140fd"/>
   </p:notesMasterIdLst>
   <p:sldIdLst>
-    <p:sldId xmlns:r="http://schemas.openxmlformats.org/officeDocument/2006/relationships" id="256" r:id="R92b67e13bebd40f0"/>
-    <p:sldId xmlns:r="http://schemas.openxmlformats.org/officeDocument/2006/relationships" id="257" r:id="R7ff52a8082444207"/>
-    <p:sldId xmlns:r="http://schemas.openxmlformats.org/officeDocument/2006/relationships" id="258" r:id="R31cd1cb8907f4e7a"/>
-    <p:sldId xmlns:r="http://schemas.openxmlformats.org/officeDocument/2006/relationships" id="259" r:id="Rdae29cebe5ff48f9"/>
-    <p:sldId xmlns:r="http://schemas.openxmlformats.org/officeDocument/2006/relationships" id="260" r:id="R1a9d877d358c45b0"/>
-    <p:sldId xmlns:r="http://schemas.openxmlformats.org/officeDocument/2006/relationships" id="261" r:id="R72bf074124b04a1a"/>
-    <p:sldId xmlns:r="http://schemas.openxmlformats.org/officeDocument/2006/relationships" id="262" r:id="Rf6d7aaf2a3fa4e6e"/>
-    <p:sldId xmlns:r="http://schemas.openxmlformats.org/officeDocument/2006/relationships" id="263" r:id="Rba56d1c5c4524f46"/>
-    <p:sldId xmlns:r="http://schemas.openxmlformats.org/officeDocument/2006/relationships" id="264" r:id="R51fbfced3a204ffc"/>
-    <p:sldId xmlns:r="http://schemas.openxmlformats.org/officeDocument/2006/relationships" id="265" r:id="R2dd2a22aa0734b1a"/>
+    <p:sldId xmlns:r="http://schemas.openxmlformats.org/officeDocument/2006/relationships" id="256" r:id="R2cd5741d69b0420f"/>
+    <p:sldId xmlns:r="http://schemas.openxmlformats.org/officeDocument/2006/relationships" id="257" r:id="R8343bd750b684016"/>
+    <p:sldId xmlns:r="http://schemas.openxmlformats.org/officeDocument/2006/relationships" id="258" r:id="Rea3c5b7d1631423d"/>
+    <p:sldId xmlns:r="http://schemas.openxmlformats.org/officeDocument/2006/relationships" id="259" r:id="R74941942c07c4575"/>
+    <p:sldId xmlns:r="http://schemas.openxmlformats.org/officeDocument/2006/relationships" id="260" r:id="R32e7b5b2608649d5"/>
+    <p:sldId xmlns:r="http://schemas.openxmlformats.org/officeDocument/2006/relationships" id="261" r:id="R177c5a630e2347e6"/>
+    <p:sldId xmlns:r="http://schemas.openxmlformats.org/officeDocument/2006/relationships" id="262" r:id="R277eb6e00d184fcc"/>
+    <p:sldId xmlns:r="http://schemas.openxmlformats.org/officeDocument/2006/relationships" id="263" r:id="R81bb6fc26afe4989"/>
+    <p:sldId xmlns:r="http://schemas.openxmlformats.org/officeDocument/2006/relationships" id="264" r:id="Rb7d437dcb7354b59"/>
+    <p:sldId xmlns:r="http://schemas.openxmlformats.org/officeDocument/2006/relationships" id="265" r:id="Rf721a61417744731"/>
   </p:sldIdLst>
   <p:sldSz cx="12192000" cy="6858000"/>
   <p:notesSz cx="6858000" cy="9144000"/>
@@ -1149,7 +1149,7 @@
   </p:cSld>
   <p:clrMap bg1="lt1" tx1="dk1" bg2="lt2" tx2="dk2" accent1="accent1" accent2="accent2" accent3="accent3" accent4="accent4" accent5="accent5" accent6="accent6" hlink="hlink" folHlink="folHlink"/>
   <p:sldLayoutIdLst>
-    <p:sldLayoutId xmlns:r="http://schemas.openxmlformats.org/officeDocument/2006/relationships" id="2147483649" r:id="R2e006090e9f74b21"/>
+    <p:sldLayoutId xmlns:r="http://schemas.openxmlformats.org/officeDocument/2006/relationships" id="2147483649" r:id="Rf6f4e111c586471c"/>
   </p:sldLayoutIdLst>
   <p:txStyles>
     <p:titleStyle>
@@ -1697,10 +1697,10 @@
       </p:grpSpPr>
       <p:sp>
         <p:nvSpPr>
-          <p:cNvPr id="7" name="text-1">
+          <p:cNvPr id="10" name="text-1">
             <a:extLst xmlns:a="http://schemas.openxmlformats.org/drawingml/2006/main">
               <a:ext uri="{FF2B5EF4-FFF2-40B4-BE49-F238E27FC236}">
-                <a16:creationId xmlns:a16="http://schemas.microsoft.com/office/drawing/2014/main" id="{8938F0B8-C3DF-456F-90D0-25A26091DCCA}"/>
+                <a16:creationId xmlns:a16="http://schemas.microsoft.com/office/drawing/2014/main" id="{B4F26B5B-8CDA-4A26-90C0-13D28FE59A94}"/>
               </a:ext>
             </a:extLst>
           </p:cNvPr>
@@ -1757,7 +1757,7 @@
           <p:cNvPr id="2" name="text-2">
             <a:extLst xmlns:a="http://schemas.openxmlformats.org/drawingml/2006/main">
               <a:ext uri="{FF2B5EF4-FFF2-40B4-BE49-F238E27FC236}">
-                <a16:creationId xmlns:a16="http://schemas.microsoft.com/office/drawing/2014/main" id="{D1E15BB5-F690-4FE8-9769-FF274C611F9A}"/>
+                <a16:creationId xmlns:a16="http://schemas.microsoft.com/office/drawing/2014/main" id="{83CE3998-9614-4753-B7D4-ED81F8324D02}"/>
               </a:ext>
             </a:extLst>
           </p:cNvPr>
@@ -1814,7 +1814,7 @@
           <p:cNvPr id="3" name="text-3">
             <a:extLst xmlns:a="http://schemas.openxmlformats.org/drawingml/2006/main">
               <a:ext uri="{FF2B5EF4-FFF2-40B4-BE49-F238E27FC236}">
-                <a16:creationId xmlns:a16="http://schemas.microsoft.com/office/drawing/2014/main" id="{8CBCE219-4AEF-40FC-83BC-2D15FC31635E}"/>
+                <a16:creationId xmlns:a16="http://schemas.microsoft.com/office/drawing/2014/main" id="{B62B088C-7B95-4803-B668-7FFD21AD2907}"/>
               </a:ext>
             </a:extLst>
           </p:cNvPr>
@@ -1871,7 +1871,7 @@
           <p:cNvPr id="4" name="text-4">
             <a:extLst xmlns:a="http://schemas.openxmlformats.org/drawingml/2006/main">
               <a:ext uri="{FF2B5EF4-FFF2-40B4-BE49-F238E27FC236}">
-                <a16:creationId xmlns:a16="http://schemas.microsoft.com/office/drawing/2014/main" id="{52C14827-70AE-444A-BC83-152EE3D6987C}"/>
+                <a16:creationId xmlns:a16="http://schemas.microsoft.com/office/drawing/2014/main" id="{3FDA3607-7267-4B16-A342-062F33FF33C6}"/>
               </a:ext>
             </a:extLst>
           </p:cNvPr>
@@ -1951,7 +1951,7 @@
           <p:cNvPr id="5" name="text-5">
             <a:extLst xmlns:a="http://schemas.openxmlformats.org/drawingml/2006/main">
               <a:ext uri="{FF2B5EF4-FFF2-40B4-BE49-F238E27FC236}">
-                <a16:creationId xmlns:a16="http://schemas.microsoft.com/office/drawing/2014/main" id="{A5B15234-DA69-4768-A56D-4B6A1F325E82}"/>
+                <a16:creationId xmlns:a16="http://schemas.microsoft.com/office/drawing/2014/main" id="{16D57244-9628-49BA-9E23-E42158DCB8DE}"/>
               </a:ext>
             </a:extLst>
           </p:cNvPr>
@@ -1962,8 +1962,8 @@
         </p:nvSpPr>
         <p:spPr>
           <a:xfrm xmlns:a="http://schemas.openxmlformats.org/drawingml/2006/main">
-            <a:off x="657225" y="5772150"/>
-            <a:ext cx="10668000" cy="304800"/>
+            <a:off x="657225" y="5048250"/>
+            <a:ext cx="10668000" cy="190500"/>
           </a:xfrm>
           <a:prstGeom xmlns:a="http://schemas.openxmlformats.org/drawingml/2006/main" prst="rect">
             <a:avLst/>
@@ -1980,7 +1980,7 @@
           <a:lstStyle xmlns:a="http://schemas.openxmlformats.org/drawingml/2006/main"/>
           <a:p xmlns:a="http://schemas.openxmlformats.org/drawingml/2006/main">
             <a:pPr>
-              <a:defRPr sz="1575" b="0">
+              <a:defRPr sz="1125" b="0">
                 <a:solidFill>
                   <a:srgbClr val="B8D3FF"/>
                 </a:solidFill>
@@ -1990,15 +1990,21 @@
               </a:defRPr>
             </a:pPr>
             <a:r>
-              <a:rPr sz="1575" b="0">
+              <a:rPr b="1">
                 <a:solidFill>
                   <a:srgbClr val="B8D3FF"/>
                 </a:solidFill>
-                <a:latin typeface="Apple SD Gothic Neo"/>
-                <a:ea typeface="Apple SD Gothic Neo"/>
-                <a:cs typeface="Apple SD Gothic Neo"/>
-              </a:rPr>
-              <a:t>Chrome MV3 확장 · Ethereum 거래 해석 · AI API 설명 경로</a:t>
+              </a:rPr>
+              <a:t>GitHub  </a:t>
+            </a:r>
+            <a:r>
+              <a:rPr u="sng">
+                <a:solidFill>
+                  <a:srgbClr val="B8D3FF"/>
+                </a:solidFill>
+                <a:hlinkClick xmlns:r="http://schemas.openxmlformats.org/officeDocument/2006/relationships" r:id="R9706ee4440254d07"/>
+              </a:rPr>
+              <a:t>github.com/diveyreadytodive-star/chainlens</a:t>
             </a:r>
           </a:p>
         </p:txBody>
@@ -2008,7 +2014,7 @@
           <p:cNvPr id="6" name="text-6">
             <a:extLst xmlns:a="http://schemas.openxmlformats.org/drawingml/2006/main">
               <a:ext uri="{FF2B5EF4-FFF2-40B4-BE49-F238E27FC236}">
-                <a16:creationId xmlns:a16="http://schemas.microsoft.com/office/drawing/2014/main" id="{639CD528-DCE9-4D99-BB48-75DA7BA05762}"/>
+                <a16:creationId xmlns:a16="http://schemas.microsoft.com/office/drawing/2014/main" id="{E83F43E2-C4FB-42C5-AAF9-0D292393089B}"/>
               </a:ext>
             </a:extLst>
           </p:cNvPr>
@@ -2019,8 +2025,8 @@
         </p:nvSpPr>
         <p:spPr>
           <a:xfrm xmlns:a="http://schemas.openxmlformats.org/drawingml/2006/main">
-            <a:off x="657225" y="6181725"/>
-            <a:ext cx="10668000" cy="238125"/>
+            <a:off x="657225" y="5267325"/>
+            <a:ext cx="10668000" cy="190500"/>
           </a:xfrm>
           <a:prstGeom xmlns:a="http://schemas.openxmlformats.org/drawingml/2006/main" prst="rect">
             <a:avLst/>
@@ -2037,6 +2043,189 @@
           <a:lstStyle xmlns:a="http://schemas.openxmlformats.org/drawingml/2006/main"/>
           <a:p xmlns:a="http://schemas.openxmlformats.org/drawingml/2006/main">
             <a:pPr>
+              <a:defRPr sz="1125" b="0">
+                <a:solidFill>
+                  <a:srgbClr val="B8D3FF"/>
+                </a:solidFill>
+                <a:latin typeface="Apple SD Gothic Neo"/>
+                <a:ea typeface="Apple SD Gothic Neo"/>
+                <a:cs typeface="Apple SD Gothic Neo"/>
+              </a:defRPr>
+            </a:pPr>
+            <a:r>
+              <a:rPr b="1">
+                <a:solidFill>
+                  <a:srgbClr val="B8D3FF"/>
+                </a:solidFill>
+              </a:rPr>
+              <a:t>Web Demo  </a:t>
+            </a:r>
+            <a:r>
+              <a:rPr u="sng">
+                <a:solidFill>
+                  <a:srgbClr val="B8D3FF"/>
+                </a:solidFill>
+                <a:hlinkClick xmlns:r="http://schemas.openxmlformats.org/officeDocument/2006/relationships" r:id="Rc762888116eb445b"/>
+              </a:rPr>
+              <a:t>chainlens-lyart.vercel.app</a:t>
+            </a:r>
+          </a:p>
+        </p:txBody>
+      </p:sp>
+      <p:sp>
+        <p:nvSpPr>
+          <p:cNvPr id="7" name="text-7">
+            <a:extLst xmlns:a="http://schemas.openxmlformats.org/drawingml/2006/main">
+              <a:ext uri="{FF2B5EF4-FFF2-40B4-BE49-F238E27FC236}">
+                <a16:creationId xmlns:a16="http://schemas.microsoft.com/office/drawing/2014/main" id="{38A2958A-A838-4BDF-9F00-A0CE04007B49}"/>
+              </a:ext>
+            </a:extLst>
+          </p:cNvPr>
+          <p:cNvSpPr>
+            <a:spLocks xmlns:a="http://schemas.openxmlformats.org/drawingml/2006/main" noGrp="1"/>
+          </p:cNvSpPr>
+          <p:nvPr/>
+        </p:nvSpPr>
+        <p:spPr>
+          <a:xfrm xmlns:a="http://schemas.openxmlformats.org/drawingml/2006/main">
+            <a:off x="657225" y="5486400"/>
+            <a:ext cx="10668000" cy="190500"/>
+          </a:xfrm>
+          <a:prstGeom xmlns:a="http://schemas.openxmlformats.org/drawingml/2006/main" prst="rect">
+            <a:avLst/>
+          </a:prstGeom>
+          <a:noFill xmlns:a="http://schemas.openxmlformats.org/drawingml/2006/main"/>
+          <a:ln xmlns:a="http://schemas.openxmlformats.org/drawingml/2006/main" w="0">
+            <a:noFill/>
+          </a:ln>
+        </p:spPr>
+        <p:txBody>
+          <a:bodyPr xmlns:a="http://schemas.openxmlformats.org/drawingml/2006/main" wrap="square" lIns="0" tIns="0" rIns="0" bIns="0" anchor="t">
+            <a:noAutofit/>
+          </a:bodyPr>
+          <a:lstStyle xmlns:a="http://schemas.openxmlformats.org/drawingml/2006/main"/>
+          <a:p xmlns:a="http://schemas.openxmlformats.org/drawingml/2006/main">
+            <a:pPr>
+              <a:defRPr sz="1125" b="0">
+                <a:solidFill>
+                  <a:srgbClr val="B8D3FF"/>
+                </a:solidFill>
+                <a:latin typeface="Apple SD Gothic Neo"/>
+                <a:ea typeface="Apple SD Gothic Neo"/>
+                <a:cs typeface="Apple SD Gothic Neo"/>
+              </a:defRPr>
+            </a:pPr>
+            <a:r>
+              <a:rPr b="1">
+                <a:solidFill>
+                  <a:srgbClr val="B8D3FF"/>
+                </a:solidFill>
+              </a:rPr>
+              <a:t>Demo Video  </a:t>
+            </a:r>
+            <a:r>
+              <a:rPr u="sng">
+                <a:solidFill>
+                  <a:srgbClr val="B8D3FF"/>
+                </a:solidFill>
+                <a:hlinkClick xmlns:r="http://schemas.openxmlformats.org/officeDocument/2006/relationships" r:id="R740352a845c54c3b"/>
+              </a:rPr>
+              <a:t>youtu.be/6VMEIPlQack</a:t>
+            </a:r>
+          </a:p>
+        </p:txBody>
+      </p:sp>
+      <p:sp>
+        <p:nvSpPr>
+          <p:cNvPr id="8" name="text-8">
+            <a:extLst xmlns:a="http://schemas.openxmlformats.org/drawingml/2006/main">
+              <a:ext uri="{FF2B5EF4-FFF2-40B4-BE49-F238E27FC236}">
+                <a16:creationId xmlns:a16="http://schemas.microsoft.com/office/drawing/2014/main" id="{57D13FCE-D0E5-414E-AF4B-BB2A0374FBB9}"/>
+              </a:ext>
+            </a:extLst>
+          </p:cNvPr>
+          <p:cNvSpPr>
+            <a:spLocks xmlns:a="http://schemas.openxmlformats.org/drawingml/2006/main" noGrp="1"/>
+          </p:cNvSpPr>
+          <p:nvPr/>
+        </p:nvSpPr>
+        <p:spPr>
+          <a:xfrm xmlns:a="http://schemas.openxmlformats.org/drawingml/2006/main">
+            <a:off x="657225" y="5772150"/>
+            <a:ext cx="10668000" cy="304800"/>
+          </a:xfrm>
+          <a:prstGeom xmlns:a="http://schemas.openxmlformats.org/drawingml/2006/main" prst="rect">
+            <a:avLst/>
+          </a:prstGeom>
+          <a:noFill xmlns:a="http://schemas.openxmlformats.org/drawingml/2006/main"/>
+          <a:ln xmlns:a="http://schemas.openxmlformats.org/drawingml/2006/main" w="0">
+            <a:noFill/>
+          </a:ln>
+        </p:spPr>
+        <p:txBody>
+          <a:bodyPr xmlns:a="http://schemas.openxmlformats.org/drawingml/2006/main" wrap="square" lIns="0" tIns="0" rIns="0" bIns="0" anchor="t">
+            <a:noAutofit/>
+          </a:bodyPr>
+          <a:lstStyle xmlns:a="http://schemas.openxmlformats.org/drawingml/2006/main"/>
+          <a:p xmlns:a="http://schemas.openxmlformats.org/drawingml/2006/main">
+            <a:pPr>
+              <a:defRPr sz="1575" b="0">
+                <a:solidFill>
+                  <a:srgbClr val="B8D3FF"/>
+                </a:solidFill>
+                <a:latin typeface="Apple SD Gothic Neo"/>
+                <a:ea typeface="Apple SD Gothic Neo"/>
+                <a:cs typeface="Apple SD Gothic Neo"/>
+              </a:defRPr>
+            </a:pPr>
+            <a:r>
+              <a:rPr sz="1575" b="0">
+                <a:solidFill>
+                  <a:srgbClr val="B8D3FF"/>
+                </a:solidFill>
+                <a:latin typeface="Apple SD Gothic Neo"/>
+                <a:ea typeface="Apple SD Gothic Neo"/>
+                <a:cs typeface="Apple SD Gothic Neo"/>
+              </a:rPr>
+              <a:t>Chrome MV3 확장 · Ethereum 거래 해석 · AI API 설명 경로</a:t>
+            </a:r>
+          </a:p>
+        </p:txBody>
+      </p:sp>
+      <p:sp>
+        <p:nvSpPr>
+          <p:cNvPr id="9" name="text-9">
+            <a:extLst xmlns:a="http://schemas.openxmlformats.org/drawingml/2006/main">
+              <a:ext uri="{FF2B5EF4-FFF2-40B4-BE49-F238E27FC236}">
+                <a16:creationId xmlns:a16="http://schemas.microsoft.com/office/drawing/2014/main" id="{59702689-FDDE-40C0-BDAD-A8266E1177C2}"/>
+              </a:ext>
+            </a:extLst>
+          </p:cNvPr>
+          <p:cNvSpPr>
+            <a:spLocks xmlns:a="http://schemas.openxmlformats.org/drawingml/2006/main" noGrp="1"/>
+          </p:cNvSpPr>
+          <p:nvPr/>
+        </p:nvSpPr>
+        <p:spPr>
+          <a:xfrm xmlns:a="http://schemas.openxmlformats.org/drawingml/2006/main">
+            <a:off x="657225" y="6181725"/>
+            <a:ext cx="10668000" cy="238125"/>
+          </a:xfrm>
+          <a:prstGeom xmlns:a="http://schemas.openxmlformats.org/drawingml/2006/main" prst="rect">
+            <a:avLst/>
+          </a:prstGeom>
+          <a:noFill xmlns:a="http://schemas.openxmlformats.org/drawingml/2006/main"/>
+          <a:ln xmlns:a="http://schemas.openxmlformats.org/drawingml/2006/main" w="0">
+            <a:noFill/>
+          </a:ln>
+        </p:spPr>
+        <p:txBody>
+          <a:bodyPr xmlns:a="http://schemas.openxmlformats.org/drawingml/2006/main" wrap="square" lIns="0" tIns="0" rIns="0" bIns="0" anchor="t">
+            <a:noAutofit/>
+          </a:bodyPr>
+          <a:lstStyle xmlns:a="http://schemas.openxmlformats.org/drawingml/2006/main"/>
+          <a:p xmlns:a="http://schemas.openxmlformats.org/drawingml/2006/main">
+            <a:pPr>
               <a:defRPr sz="1425" b="0">
                 <a:solidFill>
                   <a:srgbClr val="B8D3FF"/>
@@ -2063,7 +2252,7 @@
     </p:spTree>
     <p:extLst>
       <p:ext uri="{BB962C8B-B14F-4D97-AF65-F5344CB8AC3E}">
-        <p14:creationId xmlns:p14="http://schemas.microsoft.com/office/powerpoint/2010/main" val="165721257"/>
+        <p14:creationId xmlns:p14="http://schemas.microsoft.com/office/powerpoint/2010/main" val="570100297"/>
       </p:ext>
     </p:extLst>
   </p:cSld>
@@ -2091,10 +2280,10 @@
       </p:grpSpPr>
       <p:sp>
         <p:nvSpPr>
-          <p:cNvPr id="10" name="text-75">
+          <p:cNvPr id="10" name="text-78">
             <a:extLst xmlns:a="http://schemas.openxmlformats.org/drawingml/2006/main">
               <a:ext uri="{FF2B5EF4-FFF2-40B4-BE49-F238E27FC236}">
-                <a16:creationId xmlns:a16="http://schemas.microsoft.com/office/drawing/2014/main" id="{C998D3D7-F833-4503-B8AC-6C954C942361}"/>
+                <a16:creationId xmlns:a16="http://schemas.microsoft.com/office/drawing/2014/main" id="{146C68D1-94A2-4222-A82C-D6430909F143}"/>
               </a:ext>
             </a:extLst>
           </p:cNvPr>
@@ -2148,10 +2337,10 @@
       </p:sp>
       <p:sp>
         <p:nvSpPr>
-          <p:cNvPr id="2" name="text-76">
+          <p:cNvPr id="2" name="text-79">
             <a:extLst xmlns:a="http://schemas.openxmlformats.org/drawingml/2006/main">
               <a:ext uri="{FF2B5EF4-FFF2-40B4-BE49-F238E27FC236}">
-                <a16:creationId xmlns:a16="http://schemas.microsoft.com/office/drawing/2014/main" id="{4E511964-7463-41C6-A3D8-2F270247E743}"/>
+                <a16:creationId xmlns:a16="http://schemas.microsoft.com/office/drawing/2014/main" id="{A1464F35-D033-4901-AA6C-BFF5E4AD0255}"/>
               </a:ext>
             </a:extLst>
           </p:cNvPr>
@@ -2208,7 +2397,7 @@
           <p:cNvPr id="3" name="">
             <a:extLst xmlns:a="http://schemas.openxmlformats.org/drawingml/2006/main">
               <a:ext uri="{FF2B5EF4-FFF2-40B4-BE49-F238E27FC236}">
-                <a16:creationId xmlns:a16="http://schemas.microsoft.com/office/drawing/2014/main" id="{9274261B-73F2-490B-9805-F6CE6A188A01}"/>
+                <a16:creationId xmlns:a16="http://schemas.microsoft.com/office/drawing/2014/main" id="{7DFB586D-BACD-40A7-8E65-DFAECCE3DD7D}"/>
               </a:ext>
             </a:extLst>
           </p:cNvPr>
@@ -2235,10 +2424,10 @@
       </p:sp>
       <p:sp>
         <p:nvSpPr>
-          <p:cNvPr id="4" name="text-77">
+          <p:cNvPr id="4" name="text-80">
             <a:extLst xmlns:a="http://schemas.openxmlformats.org/drawingml/2006/main">
               <a:ext uri="{FF2B5EF4-FFF2-40B4-BE49-F238E27FC236}">
-                <a16:creationId xmlns:a16="http://schemas.microsoft.com/office/drawing/2014/main" id="{8A6E9B18-6178-4741-995F-7C7EF81819A0}"/>
+                <a16:creationId xmlns:a16="http://schemas.microsoft.com/office/drawing/2014/main" id="{5F816570-5F37-4211-B18E-A45739AA73C3}"/>
               </a:ext>
             </a:extLst>
           </p:cNvPr>
@@ -2292,10 +2481,10 @@
       </p:sp>
       <p:sp>
         <p:nvSpPr>
-          <p:cNvPr id="5" name="text-78">
+          <p:cNvPr id="5" name="text-81">
             <a:extLst xmlns:a="http://schemas.openxmlformats.org/drawingml/2006/main">
               <a:ext uri="{FF2B5EF4-FFF2-40B4-BE49-F238E27FC236}">
-                <a16:creationId xmlns:a16="http://schemas.microsoft.com/office/drawing/2014/main" id="{B040BDDE-2290-444C-B03F-1749CA20B770}"/>
+                <a16:creationId xmlns:a16="http://schemas.microsoft.com/office/drawing/2014/main" id="{3608BFDE-8CC1-4DF7-B64F-A26D2BA451EF}"/>
               </a:ext>
             </a:extLst>
           </p:cNvPr>
@@ -2749,10 +2938,10 @@
       </p:graphicFrame>
       <p:sp>
         <p:nvSpPr>
-          <p:cNvPr id="7" name="text-79">
+          <p:cNvPr id="7" name="text-82">
             <a:extLst xmlns:a="http://schemas.openxmlformats.org/drawingml/2006/main">
               <a:ext uri="{FF2B5EF4-FFF2-40B4-BE49-F238E27FC236}">
-                <a16:creationId xmlns:a16="http://schemas.microsoft.com/office/drawing/2014/main" id="{D62A1383-C51D-48C2-9046-8DABF9F96934}"/>
+                <a16:creationId xmlns:a16="http://schemas.microsoft.com/office/drawing/2014/main" id="{5EE90F4D-168A-43E4-9D66-8C036DED9052}"/>
               </a:ext>
             </a:extLst>
           </p:cNvPr>
@@ -2806,10 +2995,10 @@
       </p:sp>
       <p:sp>
         <p:nvSpPr>
-          <p:cNvPr id="8" name="text-80">
+          <p:cNvPr id="8" name="text-83">
             <a:extLst xmlns:a="http://schemas.openxmlformats.org/drawingml/2006/main">
               <a:ext uri="{FF2B5EF4-FFF2-40B4-BE49-F238E27FC236}">
-                <a16:creationId xmlns:a16="http://schemas.microsoft.com/office/drawing/2014/main" id="{4B1A5F9F-71C8-4278-8DAA-054F7363A7C0}"/>
+                <a16:creationId xmlns:a16="http://schemas.microsoft.com/office/drawing/2014/main" id="{7ACDB7BA-D896-4FB1-BCC5-950ADBAFE572}"/>
               </a:ext>
             </a:extLst>
           </p:cNvPr>
@@ -2886,10 +3075,10 @@
       </p:sp>
       <p:sp>
         <p:nvSpPr>
-          <p:cNvPr id="9" name="text-81">
+          <p:cNvPr id="9" name="text-84">
             <a:extLst xmlns:a="http://schemas.openxmlformats.org/drawingml/2006/main">
               <a:ext uri="{FF2B5EF4-FFF2-40B4-BE49-F238E27FC236}">
-                <a16:creationId xmlns:a16="http://schemas.microsoft.com/office/drawing/2014/main" id="{1882BA75-6A8E-4036-BDAE-52244ACA2196}"/>
+                <a16:creationId xmlns:a16="http://schemas.microsoft.com/office/drawing/2014/main" id="{4FD5367B-A1D8-4674-8944-9629AF6E8B07}"/>
               </a:ext>
             </a:extLst>
           </p:cNvPr>
@@ -2944,7 +3133,7 @@
     </p:spTree>
     <p:extLst>
       <p:ext uri="{BB962C8B-B14F-4D97-AF65-F5344CB8AC3E}">
-        <p14:creationId xmlns:p14="http://schemas.microsoft.com/office/powerpoint/2010/main" val="1944919626"/>
+        <p14:creationId xmlns:p14="http://schemas.microsoft.com/office/powerpoint/2010/main" val="271735394"/>
       </p:ext>
     </p:extLst>
   </p:cSld>
@@ -2972,10 +3161,10 @@
       </p:grpSpPr>
       <p:sp>
         <p:nvSpPr>
-          <p:cNvPr id="11" name="text-7">
+          <p:cNvPr id="11" name="text-10">
             <a:extLst xmlns:a="http://schemas.openxmlformats.org/drawingml/2006/main">
               <a:ext uri="{FF2B5EF4-FFF2-40B4-BE49-F238E27FC236}">
-                <a16:creationId xmlns:a16="http://schemas.microsoft.com/office/drawing/2014/main" id="{14D4E2FA-CCDB-4EBF-8A6B-235C85C58082}"/>
+                <a16:creationId xmlns:a16="http://schemas.microsoft.com/office/drawing/2014/main" id="{7FE41070-20AC-4F73-8DF9-3B1C9F903880}"/>
               </a:ext>
             </a:extLst>
           </p:cNvPr>
@@ -3029,10 +3218,10 @@
       </p:sp>
       <p:sp>
         <p:nvSpPr>
-          <p:cNvPr id="2" name="text-8">
+          <p:cNvPr id="2" name="text-11">
             <a:extLst xmlns:a="http://schemas.openxmlformats.org/drawingml/2006/main">
               <a:ext uri="{FF2B5EF4-FFF2-40B4-BE49-F238E27FC236}">
-                <a16:creationId xmlns:a16="http://schemas.microsoft.com/office/drawing/2014/main" id="{56A19275-623A-4C58-B20F-4186F3FB5A13}"/>
+                <a16:creationId xmlns:a16="http://schemas.microsoft.com/office/drawing/2014/main" id="{6B043941-7115-4EA3-9125-997AE791E8A6}"/>
               </a:ext>
             </a:extLst>
           </p:cNvPr>
@@ -3089,7 +3278,7 @@
           <p:cNvPr id="3" name="">
             <a:extLst xmlns:a="http://schemas.openxmlformats.org/drawingml/2006/main">
               <a:ext uri="{FF2B5EF4-FFF2-40B4-BE49-F238E27FC236}">
-                <a16:creationId xmlns:a16="http://schemas.microsoft.com/office/drawing/2014/main" id="{303C27F6-987E-4D80-995F-34F8988183AE}"/>
+                <a16:creationId xmlns:a16="http://schemas.microsoft.com/office/drawing/2014/main" id="{123E6701-ED50-491D-8B2D-11D9A104BD98}"/>
               </a:ext>
             </a:extLst>
           </p:cNvPr>
@@ -3116,10 +3305,10 @@
       </p:sp>
       <p:sp>
         <p:nvSpPr>
-          <p:cNvPr id="4" name="text-9">
+          <p:cNvPr id="4" name="text-12">
             <a:extLst xmlns:a="http://schemas.openxmlformats.org/drawingml/2006/main">
               <a:ext uri="{FF2B5EF4-FFF2-40B4-BE49-F238E27FC236}">
-                <a16:creationId xmlns:a16="http://schemas.microsoft.com/office/drawing/2014/main" id="{22C3ABD4-E4F6-4351-838F-7F32D15A1BDB}"/>
+                <a16:creationId xmlns:a16="http://schemas.microsoft.com/office/drawing/2014/main" id="{99180041-541B-408F-B465-906026E3008A}"/>
               </a:ext>
             </a:extLst>
           </p:cNvPr>
@@ -3173,10 +3362,10 @@
       </p:sp>
       <p:sp>
         <p:nvSpPr>
-          <p:cNvPr id="5" name="text-10">
+          <p:cNvPr id="5" name="text-13">
             <a:extLst xmlns:a="http://schemas.openxmlformats.org/drawingml/2006/main">
               <a:ext uri="{FF2B5EF4-FFF2-40B4-BE49-F238E27FC236}">
-                <a16:creationId xmlns:a16="http://schemas.microsoft.com/office/drawing/2014/main" id="{AE95D44D-E342-4C57-B9AC-2D3850475A6A}"/>
+                <a16:creationId xmlns:a16="http://schemas.microsoft.com/office/drawing/2014/main" id="{BA86A220-3406-468A-A2FA-F544966B6F98}"/>
               </a:ext>
             </a:extLst>
           </p:cNvPr>
@@ -3230,10 +3419,10 @@
       </p:sp>
       <p:sp>
         <p:nvSpPr>
-          <p:cNvPr id="6" name="text-11">
+          <p:cNvPr id="6" name="text-14">
             <a:extLst xmlns:a="http://schemas.openxmlformats.org/drawingml/2006/main">
               <a:ext uri="{FF2B5EF4-FFF2-40B4-BE49-F238E27FC236}">
-                <a16:creationId xmlns:a16="http://schemas.microsoft.com/office/drawing/2014/main" id="{B1A704E5-428C-404F-A70D-5909A23C2028}"/>
+                <a16:creationId xmlns:a16="http://schemas.microsoft.com/office/drawing/2014/main" id="{50E0FDB4-C89F-4E89-B8A9-C01AAAF7DB59}"/>
               </a:ext>
             </a:extLst>
           </p:cNvPr>
@@ -3310,10 +3499,10 @@
       </p:sp>
       <p:sp>
         <p:nvSpPr>
-          <p:cNvPr id="7" name="text-12">
+          <p:cNvPr id="7" name="text-15">
             <a:extLst xmlns:a="http://schemas.openxmlformats.org/drawingml/2006/main">
               <a:ext uri="{FF2B5EF4-FFF2-40B4-BE49-F238E27FC236}">
-                <a16:creationId xmlns:a16="http://schemas.microsoft.com/office/drawing/2014/main" id="{A144AAF3-F44E-49E4-A7A3-DC7DBCC46868}"/>
+                <a16:creationId xmlns:a16="http://schemas.microsoft.com/office/drawing/2014/main" id="{19312CE4-C87E-42D1-8F27-A61B3917CAF0}"/>
               </a:ext>
             </a:extLst>
           </p:cNvPr>
@@ -3628,10 +3817,10 @@
       </p:graphicFrame>
       <p:sp>
         <p:nvSpPr>
-          <p:cNvPr id="9" name="text-13">
+          <p:cNvPr id="9" name="text-16">
             <a:extLst xmlns:a="http://schemas.openxmlformats.org/drawingml/2006/main">
               <a:ext uri="{FF2B5EF4-FFF2-40B4-BE49-F238E27FC236}">
-                <a16:creationId xmlns:a16="http://schemas.microsoft.com/office/drawing/2014/main" id="{B0A633C8-64C2-4388-9298-ACA82BF6E31E}"/>
+                <a16:creationId xmlns:a16="http://schemas.microsoft.com/office/drawing/2014/main" id="{62C31586-AE16-432B-B1D6-7365C171B7FE}"/>
               </a:ext>
             </a:extLst>
           </p:cNvPr>
@@ -3685,10 +3874,10 @@
       </p:sp>
       <p:sp>
         <p:nvSpPr>
-          <p:cNvPr id="10" name="text-14">
+          <p:cNvPr id="10" name="text-17">
             <a:extLst xmlns:a="http://schemas.openxmlformats.org/drawingml/2006/main">
               <a:ext uri="{FF2B5EF4-FFF2-40B4-BE49-F238E27FC236}">
-                <a16:creationId xmlns:a16="http://schemas.microsoft.com/office/drawing/2014/main" id="{E777D291-2694-4153-B5F3-69B80A219BC4}"/>
+                <a16:creationId xmlns:a16="http://schemas.microsoft.com/office/drawing/2014/main" id="{FF29B382-2AEF-4B17-904F-42EB0B8F5B5C}"/>
               </a:ext>
             </a:extLst>
           </p:cNvPr>
@@ -3743,7 +3932,7 @@
     </p:spTree>
     <p:extLst>
       <p:ext uri="{BB962C8B-B14F-4D97-AF65-F5344CB8AC3E}">
-        <p14:creationId xmlns:p14="http://schemas.microsoft.com/office/powerpoint/2010/main" val="979711710"/>
+        <p14:creationId xmlns:p14="http://schemas.microsoft.com/office/powerpoint/2010/main" val="429112385"/>
       </p:ext>
     </p:extLst>
   </p:cSld>
@@ -3771,10 +3960,10 @@
       </p:grpSpPr>
       <p:sp>
         <p:nvSpPr>
-          <p:cNvPr id="10" name="text-15">
+          <p:cNvPr id="10" name="text-18">
             <a:extLst xmlns:a="http://schemas.openxmlformats.org/drawingml/2006/main">
               <a:ext uri="{FF2B5EF4-FFF2-40B4-BE49-F238E27FC236}">
-                <a16:creationId xmlns:a16="http://schemas.microsoft.com/office/drawing/2014/main" id="{26551F94-C085-4A6F-B243-D6222BAADEC7}"/>
+                <a16:creationId xmlns:a16="http://schemas.microsoft.com/office/drawing/2014/main" id="{1E65AB42-8E06-4259-98F3-F4A27B9B8E2D}"/>
               </a:ext>
             </a:extLst>
           </p:cNvPr>
@@ -3828,10 +4017,10 @@
       </p:sp>
       <p:sp>
         <p:nvSpPr>
-          <p:cNvPr id="2" name="text-16">
+          <p:cNvPr id="2" name="text-19">
             <a:extLst xmlns:a="http://schemas.openxmlformats.org/drawingml/2006/main">
               <a:ext uri="{FF2B5EF4-FFF2-40B4-BE49-F238E27FC236}">
-                <a16:creationId xmlns:a16="http://schemas.microsoft.com/office/drawing/2014/main" id="{EBDE4A1D-9E55-4BBD-9D53-3CAB13C114F2}"/>
+                <a16:creationId xmlns:a16="http://schemas.microsoft.com/office/drawing/2014/main" id="{BF13B96F-C4B7-4CBB-9971-B1C407CC848A}"/>
               </a:ext>
             </a:extLst>
           </p:cNvPr>
@@ -3888,7 +4077,7 @@
           <p:cNvPr id="3" name="">
             <a:extLst xmlns:a="http://schemas.openxmlformats.org/drawingml/2006/main">
               <a:ext uri="{FF2B5EF4-FFF2-40B4-BE49-F238E27FC236}">
-                <a16:creationId xmlns:a16="http://schemas.microsoft.com/office/drawing/2014/main" id="{814CF951-464E-4BEF-ADD0-4EC095E32732}"/>
+                <a16:creationId xmlns:a16="http://schemas.microsoft.com/office/drawing/2014/main" id="{B7BC8173-2B32-4599-B1CE-C5968943E4C7}"/>
               </a:ext>
             </a:extLst>
           </p:cNvPr>
@@ -3915,10 +4104,10 @@
       </p:sp>
       <p:sp>
         <p:nvSpPr>
-          <p:cNvPr id="4" name="text-17">
+          <p:cNvPr id="4" name="text-20">
             <a:extLst xmlns:a="http://schemas.openxmlformats.org/drawingml/2006/main">
               <a:ext uri="{FF2B5EF4-FFF2-40B4-BE49-F238E27FC236}">
-                <a16:creationId xmlns:a16="http://schemas.microsoft.com/office/drawing/2014/main" id="{2D77B32D-F1EB-41BB-A911-AADD28C4AE8C}"/>
+                <a16:creationId xmlns:a16="http://schemas.microsoft.com/office/drawing/2014/main" id="{53D58D0D-BFD7-47A7-BC4E-96C187E6BFEF}"/>
               </a:ext>
             </a:extLst>
           </p:cNvPr>
@@ -3972,10 +4161,10 @@
       </p:sp>
       <p:sp>
         <p:nvSpPr>
-          <p:cNvPr id="5" name="text-18">
+          <p:cNvPr id="5" name="text-21">
             <a:extLst xmlns:a="http://schemas.openxmlformats.org/drawingml/2006/main">
               <a:ext uri="{FF2B5EF4-FFF2-40B4-BE49-F238E27FC236}">
-                <a16:creationId xmlns:a16="http://schemas.microsoft.com/office/drawing/2014/main" id="{C5BE1A09-1B0F-4709-8972-72A0AB185B01}"/>
+                <a16:creationId xmlns:a16="http://schemas.microsoft.com/office/drawing/2014/main" id="{7ABE8CFE-C470-4602-A494-D72344440CAA}"/>
               </a:ext>
             </a:extLst>
           </p:cNvPr>
@@ -4267,10 +4456,10 @@
       </p:graphicFrame>
       <p:sp>
         <p:nvSpPr>
-          <p:cNvPr id="7" name="text-19">
+          <p:cNvPr id="7" name="text-22">
             <a:extLst xmlns:a="http://schemas.openxmlformats.org/drawingml/2006/main">
               <a:ext uri="{FF2B5EF4-FFF2-40B4-BE49-F238E27FC236}">
-                <a16:creationId xmlns:a16="http://schemas.microsoft.com/office/drawing/2014/main" id="{5063C486-60B4-4752-9DC9-E4BF7BEF1319}"/>
+                <a16:creationId xmlns:a16="http://schemas.microsoft.com/office/drawing/2014/main" id="{0817A693-CFA5-4F1F-B05E-B824A4A1B972}"/>
               </a:ext>
             </a:extLst>
           </p:cNvPr>
@@ -4324,10 +4513,10 @@
       </p:sp>
       <p:sp>
         <p:nvSpPr>
-          <p:cNvPr id="8" name="text-20">
+          <p:cNvPr id="8" name="text-23">
             <a:extLst xmlns:a="http://schemas.openxmlformats.org/drawingml/2006/main">
               <a:ext uri="{FF2B5EF4-FFF2-40B4-BE49-F238E27FC236}">
-                <a16:creationId xmlns:a16="http://schemas.microsoft.com/office/drawing/2014/main" id="{9BDB8167-E2F4-4AF7-A524-388FB6404B45}"/>
+                <a16:creationId xmlns:a16="http://schemas.microsoft.com/office/drawing/2014/main" id="{44BDC80A-C351-4085-9603-2E1D996D7F3A}"/>
               </a:ext>
             </a:extLst>
           </p:cNvPr>
@@ -4404,10 +4593,10 @@
       </p:sp>
       <p:sp>
         <p:nvSpPr>
-          <p:cNvPr id="9" name="text-21">
+          <p:cNvPr id="9" name="text-24">
             <a:extLst xmlns:a="http://schemas.openxmlformats.org/drawingml/2006/main">
               <a:ext uri="{FF2B5EF4-FFF2-40B4-BE49-F238E27FC236}">
-                <a16:creationId xmlns:a16="http://schemas.microsoft.com/office/drawing/2014/main" id="{7B5AFEFE-9601-430F-AFCA-F2953964A334}"/>
+                <a16:creationId xmlns:a16="http://schemas.microsoft.com/office/drawing/2014/main" id="{B424B1B5-2BDE-49FB-907D-84FC750FB773}"/>
               </a:ext>
             </a:extLst>
           </p:cNvPr>
@@ -4508,7 +4697,7 @@
     </p:spTree>
     <p:extLst>
       <p:ext uri="{BB962C8B-B14F-4D97-AF65-F5344CB8AC3E}">
-        <p14:creationId xmlns:p14="http://schemas.microsoft.com/office/powerpoint/2010/main" val="708573235"/>
+        <p14:creationId xmlns:p14="http://schemas.microsoft.com/office/powerpoint/2010/main" val="74744696"/>
       </p:ext>
     </p:extLst>
   </p:cSld>
@@ -4536,10 +4725,10 @@
       </p:grpSpPr>
       <p:sp>
         <p:nvSpPr>
-          <p:cNvPr id="18" name="text-22">
+          <p:cNvPr id="18" name="text-25">
             <a:extLst xmlns:a="http://schemas.openxmlformats.org/drawingml/2006/main">
               <a:ext uri="{FF2B5EF4-FFF2-40B4-BE49-F238E27FC236}">
-                <a16:creationId xmlns:a16="http://schemas.microsoft.com/office/drawing/2014/main" id="{60A17B9C-FC91-49FD-B27B-A406A89CDE15}"/>
+                <a16:creationId xmlns:a16="http://schemas.microsoft.com/office/drawing/2014/main" id="{1D99BF04-A9BE-44ED-8E72-79DAA31B6DB9}"/>
               </a:ext>
             </a:extLst>
           </p:cNvPr>
@@ -4593,10 +4782,10 @@
       </p:sp>
       <p:sp>
         <p:nvSpPr>
-          <p:cNvPr id="2" name="text-23">
+          <p:cNvPr id="2" name="text-26">
             <a:extLst xmlns:a="http://schemas.openxmlformats.org/drawingml/2006/main">
               <a:ext uri="{FF2B5EF4-FFF2-40B4-BE49-F238E27FC236}">
-                <a16:creationId xmlns:a16="http://schemas.microsoft.com/office/drawing/2014/main" id="{71708588-AD12-4D93-9AFC-957B26EBCAF5}"/>
+                <a16:creationId xmlns:a16="http://schemas.microsoft.com/office/drawing/2014/main" id="{0454DEBB-4707-4919-A1F1-3EE6A98E8942}"/>
               </a:ext>
             </a:extLst>
           </p:cNvPr>
@@ -4653,7 +4842,7 @@
           <p:cNvPr id="3" name="">
             <a:extLst xmlns:a="http://schemas.openxmlformats.org/drawingml/2006/main">
               <a:ext uri="{FF2B5EF4-FFF2-40B4-BE49-F238E27FC236}">
-                <a16:creationId xmlns:a16="http://schemas.microsoft.com/office/drawing/2014/main" id="{A20D4C32-A10A-48D9-B0E8-598FE698A777}"/>
+                <a16:creationId xmlns:a16="http://schemas.microsoft.com/office/drawing/2014/main" id="{F8D8A478-9D19-4073-9C31-411D4B8F8601}"/>
               </a:ext>
             </a:extLst>
           </p:cNvPr>
@@ -4680,10 +4869,10 @@
       </p:sp>
       <p:sp>
         <p:nvSpPr>
-          <p:cNvPr id="4" name="text-24">
+          <p:cNvPr id="4" name="text-27">
             <a:extLst xmlns:a="http://schemas.openxmlformats.org/drawingml/2006/main">
               <a:ext uri="{FF2B5EF4-FFF2-40B4-BE49-F238E27FC236}">
-                <a16:creationId xmlns:a16="http://schemas.microsoft.com/office/drawing/2014/main" id="{4BA5A2E1-0269-4B4F-B737-2F0DEED77BDA}"/>
+                <a16:creationId xmlns:a16="http://schemas.microsoft.com/office/drawing/2014/main" id="{0B8814CD-746C-4C1A-96A0-772C5ECB56E3}"/>
               </a:ext>
             </a:extLst>
           </p:cNvPr>
@@ -4737,10 +4926,10 @@
       </p:sp>
       <p:sp>
         <p:nvSpPr>
-          <p:cNvPr id="5" name="text-25">
+          <p:cNvPr id="5" name="text-28">
             <a:extLst xmlns:a="http://schemas.openxmlformats.org/drawingml/2006/main">
               <a:ext uri="{FF2B5EF4-FFF2-40B4-BE49-F238E27FC236}">
-                <a16:creationId xmlns:a16="http://schemas.microsoft.com/office/drawing/2014/main" id="{FF02586C-81DF-438D-889A-F8BDDFA7D418}"/>
+                <a16:creationId xmlns:a16="http://schemas.microsoft.com/office/drawing/2014/main" id="{A6E201BF-BD35-415B-9A40-645A36E77936}"/>
               </a:ext>
             </a:extLst>
           </p:cNvPr>
@@ -4801,7 +4990,7 @@
           <p:nvPr/>
         </p:nvPicPr>
         <p:blipFill>
-          <a:blip xmlns:r="http://schemas.openxmlformats.org/officeDocument/2006/relationships" xmlns:a="http://schemas.openxmlformats.org/drawingml/2006/main" r:embed="Ra9260f33c41b4168"/>
+          <a:blip xmlns:r="http://schemas.openxmlformats.org/officeDocument/2006/relationships" xmlns:a="http://schemas.openxmlformats.org/drawingml/2006/main" r:embed="R4b2e8e511bc242ef"/>
           <a:srcRect xmlns:a="http://schemas.openxmlformats.org/drawingml/2006/main" l="77" t="0" r="77" b="0"/>
           <a:stretch xmlns:a="http://schemas.openxmlformats.org/drawingml/2006/main">
             <a:fillRect l="0" t="0" r="0" b="0"/>
@@ -4819,10 +5008,10 @@
       </p:pic>
       <p:sp>
         <p:nvSpPr>
-          <p:cNvPr id="7" name="text-26">
+          <p:cNvPr id="7" name="text-29">
             <a:extLst xmlns:a="http://schemas.openxmlformats.org/drawingml/2006/main">
               <a:ext uri="{FF2B5EF4-FFF2-40B4-BE49-F238E27FC236}">
-                <a16:creationId xmlns:a16="http://schemas.microsoft.com/office/drawing/2014/main" id="{116E48BB-077C-4C2E-B97D-E1550FDE98F5}"/>
+                <a16:creationId xmlns:a16="http://schemas.microsoft.com/office/drawing/2014/main" id="{25387D84-FFD7-451E-9A4B-800A2CFC3672}"/>
               </a:ext>
             </a:extLst>
           </p:cNvPr>
@@ -4876,10 +5065,10 @@
       </p:sp>
       <p:sp>
         <p:nvSpPr>
-          <p:cNvPr id="8" name="text-27">
+          <p:cNvPr id="8" name="text-30">
             <a:extLst xmlns:a="http://schemas.openxmlformats.org/drawingml/2006/main">
               <a:ext uri="{FF2B5EF4-FFF2-40B4-BE49-F238E27FC236}">
-                <a16:creationId xmlns:a16="http://schemas.microsoft.com/office/drawing/2014/main" id="{6406B18C-D583-429C-96F7-330D1041D1FB}"/>
+                <a16:creationId xmlns:a16="http://schemas.microsoft.com/office/drawing/2014/main" id="{AC97DE62-3DC5-40F3-ACFD-31AE512B6D91}"/>
               </a:ext>
             </a:extLst>
           </p:cNvPr>
@@ -4933,10 +5122,10 @@
       </p:sp>
       <p:sp>
         <p:nvSpPr>
-          <p:cNvPr id="9" name="node-28">
+          <p:cNvPr id="9" name="node-31">
             <a:extLst xmlns:a="http://schemas.openxmlformats.org/drawingml/2006/main">
               <a:ext uri="{FF2B5EF4-FFF2-40B4-BE49-F238E27FC236}">
-                <a16:creationId xmlns:a16="http://schemas.microsoft.com/office/drawing/2014/main" id="{02A7E981-2BB2-4068-9AA6-A30629439644}"/>
+                <a16:creationId xmlns:a16="http://schemas.microsoft.com/office/drawing/2014/main" id="{0FCA543E-0DBC-4CB1-A215-0FF9ABC49D9E}"/>
               </a:ext>
             </a:extLst>
           </p:cNvPr>
@@ -5017,10 +5206,10 @@
       </p:sp>
       <p:sp>
         <p:nvSpPr>
-          <p:cNvPr id="10" name="node-29">
+          <p:cNvPr id="10" name="node-32">
             <a:extLst xmlns:a="http://schemas.openxmlformats.org/drawingml/2006/main">
               <a:ext uri="{FF2B5EF4-FFF2-40B4-BE49-F238E27FC236}">
-                <a16:creationId xmlns:a16="http://schemas.microsoft.com/office/drawing/2014/main" id="{7F559502-552F-4A8C-B5AC-E561CAD61C93}"/>
+                <a16:creationId xmlns:a16="http://schemas.microsoft.com/office/drawing/2014/main" id="{78C794B6-B997-411D-B4FE-2769159F5E04}"/>
               </a:ext>
             </a:extLst>
           </p:cNvPr>
@@ -5101,10 +5290,10 @@
       </p:sp>
       <p:sp>
         <p:nvSpPr>
-          <p:cNvPr id="11" name="node-30">
+          <p:cNvPr id="11" name="node-33">
             <a:extLst xmlns:a="http://schemas.openxmlformats.org/drawingml/2006/main">
               <a:ext uri="{FF2B5EF4-FFF2-40B4-BE49-F238E27FC236}">
-                <a16:creationId xmlns:a16="http://schemas.microsoft.com/office/drawing/2014/main" id="{8F46939B-22A0-4B0C-B63C-A8583CF30AFD}"/>
+                <a16:creationId xmlns:a16="http://schemas.microsoft.com/office/drawing/2014/main" id="{D9B89527-51C7-411B-A783-418F2E487FDF}"/>
               </a:ext>
             </a:extLst>
           </p:cNvPr>
@@ -5208,10 +5397,10 @@
       </p:sp>
       <p:sp>
         <p:nvSpPr>
-          <p:cNvPr id="12" name="node-31">
+          <p:cNvPr id="12" name="node-34">
             <a:extLst xmlns:a="http://schemas.openxmlformats.org/drawingml/2006/main">
               <a:ext uri="{FF2B5EF4-FFF2-40B4-BE49-F238E27FC236}">
-                <a16:creationId xmlns:a16="http://schemas.microsoft.com/office/drawing/2014/main" id="{1AE05503-C1B7-451F-8F7D-DA06F69FBD5D}"/>
+                <a16:creationId xmlns:a16="http://schemas.microsoft.com/office/drawing/2014/main" id="{14DC5E89-812F-4163-A192-02E11433A881}"/>
               </a:ext>
             </a:extLst>
           </p:cNvPr>
@@ -5390,10 +5579,10 @@
       </p:cxnSp>
       <p:sp>
         <p:nvSpPr>
-          <p:cNvPr id="16" name="text-32">
+          <p:cNvPr id="16" name="text-35">
             <a:extLst xmlns:a="http://schemas.openxmlformats.org/drawingml/2006/main">
               <a:ext uri="{FF2B5EF4-FFF2-40B4-BE49-F238E27FC236}">
-                <a16:creationId xmlns:a16="http://schemas.microsoft.com/office/drawing/2014/main" id="{1CDE1377-3696-4886-994C-239F9B672410}"/>
+                <a16:creationId xmlns:a16="http://schemas.microsoft.com/office/drawing/2014/main" id="{E0DA2DC9-054C-4F29-8B6A-DFA11525BE75}"/>
               </a:ext>
             </a:extLst>
           </p:cNvPr>
@@ -5493,10 +5682,10 @@
       </p:sp>
       <p:sp>
         <p:nvSpPr>
-          <p:cNvPr id="17" name="text-33">
+          <p:cNvPr id="17" name="text-36">
             <a:extLst xmlns:a="http://schemas.openxmlformats.org/drawingml/2006/main">
               <a:ext uri="{FF2B5EF4-FFF2-40B4-BE49-F238E27FC236}">
-                <a16:creationId xmlns:a16="http://schemas.microsoft.com/office/drawing/2014/main" id="{8C8AA2B4-DD25-430A-A867-5D36CAAAFBF6}"/>
+                <a16:creationId xmlns:a16="http://schemas.microsoft.com/office/drawing/2014/main" id="{2C45347C-B150-4A74-8A33-D9D87B09D064}"/>
               </a:ext>
             </a:extLst>
           </p:cNvPr>
@@ -5551,7 +5740,7 @@
     </p:spTree>
     <p:extLst>
       <p:ext uri="{BB962C8B-B14F-4D97-AF65-F5344CB8AC3E}">
-        <p14:creationId xmlns:p14="http://schemas.microsoft.com/office/powerpoint/2010/main" val="331355143"/>
+        <p14:creationId xmlns:p14="http://schemas.microsoft.com/office/powerpoint/2010/main" val="1130173884"/>
       </p:ext>
     </p:extLst>
   </p:cSld>
@@ -5579,10 +5768,10 @@
       </p:grpSpPr>
       <p:sp>
         <p:nvSpPr>
-          <p:cNvPr id="9" name="text-34">
+          <p:cNvPr id="9" name="text-37">
             <a:extLst xmlns:a="http://schemas.openxmlformats.org/drawingml/2006/main">
               <a:ext uri="{FF2B5EF4-FFF2-40B4-BE49-F238E27FC236}">
-                <a16:creationId xmlns:a16="http://schemas.microsoft.com/office/drawing/2014/main" id="{71315F94-B0BB-4A1C-BE81-7D41159634FA}"/>
+                <a16:creationId xmlns:a16="http://schemas.microsoft.com/office/drawing/2014/main" id="{C52D4CF0-F4F9-43D6-9B3B-45EF533D1A25}"/>
               </a:ext>
             </a:extLst>
           </p:cNvPr>
@@ -5636,10 +5825,10 @@
       </p:sp>
       <p:sp>
         <p:nvSpPr>
-          <p:cNvPr id="2" name="text-35">
+          <p:cNvPr id="2" name="text-38">
             <a:extLst xmlns:a="http://schemas.openxmlformats.org/drawingml/2006/main">
               <a:ext uri="{FF2B5EF4-FFF2-40B4-BE49-F238E27FC236}">
-                <a16:creationId xmlns:a16="http://schemas.microsoft.com/office/drawing/2014/main" id="{88184FA1-9127-47F9-A42D-8FB02156CA5C}"/>
+                <a16:creationId xmlns:a16="http://schemas.microsoft.com/office/drawing/2014/main" id="{E5F1A074-1005-4254-A6DC-1D7355457A81}"/>
               </a:ext>
             </a:extLst>
           </p:cNvPr>
@@ -5696,7 +5885,7 @@
           <p:cNvPr id="3" name="">
             <a:extLst xmlns:a="http://schemas.openxmlformats.org/drawingml/2006/main">
               <a:ext uri="{FF2B5EF4-FFF2-40B4-BE49-F238E27FC236}">
-                <a16:creationId xmlns:a16="http://schemas.microsoft.com/office/drawing/2014/main" id="{52D971D7-7057-4910-8474-4AF956C705DB}"/>
+                <a16:creationId xmlns:a16="http://schemas.microsoft.com/office/drawing/2014/main" id="{63EE6CCA-CC02-4F84-929D-FF6059445696}"/>
               </a:ext>
             </a:extLst>
           </p:cNvPr>
@@ -5723,10 +5912,10 @@
       </p:sp>
       <p:sp>
         <p:nvSpPr>
-          <p:cNvPr id="4" name="text-36">
+          <p:cNvPr id="4" name="text-39">
             <a:extLst xmlns:a="http://schemas.openxmlformats.org/drawingml/2006/main">
               <a:ext uri="{FF2B5EF4-FFF2-40B4-BE49-F238E27FC236}">
-                <a16:creationId xmlns:a16="http://schemas.microsoft.com/office/drawing/2014/main" id="{490ACF52-D310-4CF6-A767-4F0F2D1D18EC}"/>
+                <a16:creationId xmlns:a16="http://schemas.microsoft.com/office/drawing/2014/main" id="{99AF4C52-5A82-4FFA-8B48-D1E2CE0A59B4}"/>
               </a:ext>
             </a:extLst>
           </p:cNvPr>
@@ -5780,10 +5969,10 @@
       </p:sp>
       <p:sp>
         <p:nvSpPr>
-          <p:cNvPr id="5" name="text-37">
+          <p:cNvPr id="5" name="text-40">
             <a:extLst xmlns:a="http://schemas.openxmlformats.org/drawingml/2006/main">
               <a:ext uri="{FF2B5EF4-FFF2-40B4-BE49-F238E27FC236}">
-                <a16:creationId xmlns:a16="http://schemas.microsoft.com/office/drawing/2014/main" id="{57E8B0CB-B68E-4DB2-A981-5CBD7C2BFC69}"/>
+                <a16:creationId xmlns:a16="http://schemas.microsoft.com/office/drawing/2014/main" id="{08B4FB30-0E68-4FAD-85C4-E142239262B5}"/>
               </a:ext>
             </a:extLst>
           </p:cNvPr>
@@ -6180,10 +6369,10 @@
       </p:graphicFrame>
       <p:sp>
         <p:nvSpPr>
-          <p:cNvPr id="7" name="text-38">
+          <p:cNvPr id="7" name="text-41">
             <a:extLst xmlns:a="http://schemas.openxmlformats.org/drawingml/2006/main">
               <a:ext uri="{FF2B5EF4-FFF2-40B4-BE49-F238E27FC236}">
-                <a16:creationId xmlns:a16="http://schemas.microsoft.com/office/drawing/2014/main" id="{27D7C2B9-401C-4AD4-A59D-2C9824DFBDD9}"/>
+                <a16:creationId xmlns:a16="http://schemas.microsoft.com/office/drawing/2014/main" id="{1A86C65A-6CE4-4DFD-8839-A5D4F2A8D6A7}"/>
               </a:ext>
             </a:extLst>
           </p:cNvPr>
@@ -6237,10 +6426,10 @@
       </p:sp>
       <p:sp>
         <p:nvSpPr>
-          <p:cNvPr id="8" name="text-39">
+          <p:cNvPr id="8" name="text-42">
             <a:extLst xmlns:a="http://schemas.openxmlformats.org/drawingml/2006/main">
               <a:ext uri="{FF2B5EF4-FFF2-40B4-BE49-F238E27FC236}">
-                <a16:creationId xmlns:a16="http://schemas.microsoft.com/office/drawing/2014/main" id="{0E3861E7-E334-477F-9BB2-B61109E6D72A}"/>
+                <a16:creationId xmlns:a16="http://schemas.microsoft.com/office/drawing/2014/main" id="{EE6A56E3-52AE-4AEE-AAE5-5D85491EED81}"/>
               </a:ext>
             </a:extLst>
           </p:cNvPr>
@@ -6295,7 +6484,7 @@
     </p:spTree>
     <p:extLst>
       <p:ext uri="{BB962C8B-B14F-4D97-AF65-F5344CB8AC3E}">
-        <p14:creationId xmlns:p14="http://schemas.microsoft.com/office/powerpoint/2010/main" val="369053783"/>
+        <p14:creationId xmlns:p14="http://schemas.microsoft.com/office/powerpoint/2010/main" val="260344465"/>
       </p:ext>
     </p:extLst>
   </p:cSld>
@@ -6323,10 +6512,10 @@
       </p:grpSpPr>
       <p:sp>
         <p:nvSpPr>
-          <p:cNvPr id="18" name="text-40">
+          <p:cNvPr id="18" name="text-43">
             <a:extLst xmlns:a="http://schemas.openxmlformats.org/drawingml/2006/main">
               <a:ext uri="{FF2B5EF4-FFF2-40B4-BE49-F238E27FC236}">
-                <a16:creationId xmlns:a16="http://schemas.microsoft.com/office/drawing/2014/main" id="{93D90FDF-FA1D-4710-A34C-1B4F85E3AE96}"/>
+                <a16:creationId xmlns:a16="http://schemas.microsoft.com/office/drawing/2014/main" id="{B141B6F2-9671-4C4B-86C8-B68C6798C0F0}"/>
               </a:ext>
             </a:extLst>
           </p:cNvPr>
@@ -6380,10 +6569,10 @@
       </p:sp>
       <p:sp>
         <p:nvSpPr>
-          <p:cNvPr id="2" name="text-41">
+          <p:cNvPr id="2" name="text-44">
             <a:extLst xmlns:a="http://schemas.openxmlformats.org/drawingml/2006/main">
               <a:ext uri="{FF2B5EF4-FFF2-40B4-BE49-F238E27FC236}">
-                <a16:creationId xmlns:a16="http://schemas.microsoft.com/office/drawing/2014/main" id="{7958669B-A1B0-4E7A-A99C-95D52F068829}"/>
+                <a16:creationId xmlns:a16="http://schemas.microsoft.com/office/drawing/2014/main" id="{B117E85E-C267-4732-A02A-F4DC395B4F13}"/>
               </a:ext>
             </a:extLst>
           </p:cNvPr>
@@ -6440,7 +6629,7 @@
           <p:cNvPr id="3" name="">
             <a:extLst xmlns:a="http://schemas.openxmlformats.org/drawingml/2006/main">
               <a:ext uri="{FF2B5EF4-FFF2-40B4-BE49-F238E27FC236}">
-                <a16:creationId xmlns:a16="http://schemas.microsoft.com/office/drawing/2014/main" id="{0C258B0F-DFAB-406F-A24C-F4CA05E1A6F3}"/>
+                <a16:creationId xmlns:a16="http://schemas.microsoft.com/office/drawing/2014/main" id="{C93E41D8-B627-47E7-91B8-E9072E31DD1A}"/>
               </a:ext>
             </a:extLst>
           </p:cNvPr>
@@ -6467,10 +6656,10 @@
       </p:sp>
       <p:sp>
         <p:nvSpPr>
-          <p:cNvPr id="4" name="text-42">
+          <p:cNvPr id="4" name="text-45">
             <a:extLst xmlns:a="http://schemas.openxmlformats.org/drawingml/2006/main">
               <a:ext uri="{FF2B5EF4-FFF2-40B4-BE49-F238E27FC236}">
-                <a16:creationId xmlns:a16="http://schemas.microsoft.com/office/drawing/2014/main" id="{FA89A8AB-0E8F-4130-89A0-724BAAAE2371}"/>
+                <a16:creationId xmlns:a16="http://schemas.microsoft.com/office/drawing/2014/main" id="{07EAC640-6921-493F-80E9-1ABA3577788B}"/>
               </a:ext>
             </a:extLst>
           </p:cNvPr>
@@ -6524,10 +6713,10 @@
       </p:sp>
       <p:sp>
         <p:nvSpPr>
-          <p:cNvPr id="5" name="text-43">
+          <p:cNvPr id="5" name="text-46">
             <a:extLst xmlns:a="http://schemas.openxmlformats.org/drawingml/2006/main">
               <a:ext uri="{FF2B5EF4-FFF2-40B4-BE49-F238E27FC236}">
-                <a16:creationId xmlns:a16="http://schemas.microsoft.com/office/drawing/2014/main" id="{EC61ECD8-5E04-4732-BB21-53F3DF603C24}"/>
+                <a16:creationId xmlns:a16="http://schemas.microsoft.com/office/drawing/2014/main" id="{A7D49EAC-173D-4265-A5FE-319DC33FE425}"/>
               </a:ext>
             </a:extLst>
           </p:cNvPr>
@@ -6581,10 +6770,10 @@
       </p:sp>
       <p:sp>
         <p:nvSpPr>
-          <p:cNvPr id="6" name="node-44">
+          <p:cNvPr id="6" name="node-47">
             <a:extLst xmlns:a="http://schemas.openxmlformats.org/drawingml/2006/main">
               <a:ext uri="{FF2B5EF4-FFF2-40B4-BE49-F238E27FC236}">
-                <a16:creationId xmlns:a16="http://schemas.microsoft.com/office/drawing/2014/main" id="{671B8377-8A7C-44FF-8698-BFB30C531D08}"/>
+                <a16:creationId xmlns:a16="http://schemas.microsoft.com/office/drawing/2014/main" id="{E460E3E7-27A9-4594-8445-DC0C5439D9E4}"/>
               </a:ext>
             </a:extLst>
           </p:cNvPr>
@@ -6665,10 +6854,10 @@
       </p:sp>
       <p:sp>
         <p:nvSpPr>
-          <p:cNvPr id="7" name="node-45">
+          <p:cNvPr id="7" name="node-48">
             <a:extLst xmlns:a="http://schemas.openxmlformats.org/drawingml/2006/main">
               <a:ext uri="{FF2B5EF4-FFF2-40B4-BE49-F238E27FC236}">
-                <a16:creationId xmlns:a16="http://schemas.microsoft.com/office/drawing/2014/main" id="{7BCAAAEA-1CDE-4974-B853-EFDEF729D740}"/>
+                <a16:creationId xmlns:a16="http://schemas.microsoft.com/office/drawing/2014/main" id="{322BBFB1-9746-4759-9D95-9A3E0B82D00D}"/>
               </a:ext>
             </a:extLst>
           </p:cNvPr>
@@ -6749,10 +6938,10 @@
       </p:sp>
       <p:sp>
         <p:nvSpPr>
-          <p:cNvPr id="8" name="node-46">
+          <p:cNvPr id="8" name="node-49">
             <a:extLst xmlns:a="http://schemas.openxmlformats.org/drawingml/2006/main">
               <a:ext uri="{FF2B5EF4-FFF2-40B4-BE49-F238E27FC236}">
-                <a16:creationId xmlns:a16="http://schemas.microsoft.com/office/drawing/2014/main" id="{53FF9727-BFB1-4553-86BC-732D8ADDC332}"/>
+                <a16:creationId xmlns:a16="http://schemas.microsoft.com/office/drawing/2014/main" id="{10FC77FD-E805-44A3-AE6A-583101A1405F}"/>
               </a:ext>
             </a:extLst>
           </p:cNvPr>
@@ -6833,10 +7022,10 @@
       </p:sp>
       <p:sp>
         <p:nvSpPr>
-          <p:cNvPr id="9" name="node-47">
+          <p:cNvPr id="9" name="node-50">
             <a:extLst xmlns:a="http://schemas.openxmlformats.org/drawingml/2006/main">
               <a:ext uri="{FF2B5EF4-FFF2-40B4-BE49-F238E27FC236}">
-                <a16:creationId xmlns:a16="http://schemas.microsoft.com/office/drawing/2014/main" id="{56E12569-9A8B-4F4C-A775-7951C0AE2769}"/>
+                <a16:creationId xmlns:a16="http://schemas.microsoft.com/office/drawing/2014/main" id="{37094A2B-5290-4822-9523-808E0FB7E3FA}"/>
               </a:ext>
             </a:extLst>
           </p:cNvPr>
@@ -6917,10 +7106,10 @@
       </p:sp>
       <p:sp>
         <p:nvSpPr>
-          <p:cNvPr id="10" name="node-48">
+          <p:cNvPr id="10" name="node-51">
             <a:extLst xmlns:a="http://schemas.openxmlformats.org/drawingml/2006/main">
               <a:ext uri="{FF2B5EF4-FFF2-40B4-BE49-F238E27FC236}">
-                <a16:creationId xmlns:a16="http://schemas.microsoft.com/office/drawing/2014/main" id="{AF8E6546-3FA9-4D8D-A5A5-8061C6E8427A}"/>
+                <a16:creationId xmlns:a16="http://schemas.microsoft.com/office/drawing/2014/main" id="{B2C5ECC3-167E-4322-91FD-F20B9E419809}"/>
               </a:ext>
             </a:extLst>
           </p:cNvPr>
@@ -7001,10 +7190,10 @@
       </p:sp>
       <p:sp>
         <p:nvSpPr>
-          <p:cNvPr id="11" name="node-49">
+          <p:cNvPr id="11" name="node-52">
             <a:extLst xmlns:a="http://schemas.openxmlformats.org/drawingml/2006/main">
               <a:ext uri="{FF2B5EF4-FFF2-40B4-BE49-F238E27FC236}">
-                <a16:creationId xmlns:a16="http://schemas.microsoft.com/office/drawing/2014/main" id="{0738CE40-90BE-4B8E-AEA1-A1A6FC0F88A8}"/>
+                <a16:creationId xmlns:a16="http://schemas.microsoft.com/office/drawing/2014/main" id="{C620FE01-A736-4C79-91DD-00C89BD1CE8A}"/>
               </a:ext>
             </a:extLst>
           </p:cNvPr>
@@ -7210,10 +7399,10 @@
       </p:cxnSp>
       <p:sp>
         <p:nvSpPr>
-          <p:cNvPr id="17" name="text-50">
+          <p:cNvPr id="17" name="text-53">
             <a:extLst xmlns:a="http://schemas.openxmlformats.org/drawingml/2006/main">
               <a:ext uri="{FF2B5EF4-FFF2-40B4-BE49-F238E27FC236}">
-                <a16:creationId xmlns:a16="http://schemas.microsoft.com/office/drawing/2014/main" id="{66C24916-B3E7-4CF7-A015-8154A00DE0D4}"/>
+                <a16:creationId xmlns:a16="http://schemas.microsoft.com/office/drawing/2014/main" id="{B361DFCB-B39D-4B03-9FF3-31A631636AB5}"/>
               </a:ext>
             </a:extLst>
           </p:cNvPr>
@@ -7268,7 +7457,7 @@
     </p:spTree>
     <p:extLst>
       <p:ext uri="{BB962C8B-B14F-4D97-AF65-F5344CB8AC3E}">
-        <p14:creationId xmlns:p14="http://schemas.microsoft.com/office/powerpoint/2010/main" val="829697646"/>
+        <p14:creationId xmlns:p14="http://schemas.microsoft.com/office/powerpoint/2010/main" val="1959953263"/>
       </p:ext>
     </p:extLst>
   </p:cSld>
@@ -7296,10 +7485,10 @@
       </p:grpSpPr>
       <p:sp>
         <p:nvSpPr>
-          <p:cNvPr id="14" name="text-51">
+          <p:cNvPr id="14" name="text-54">
             <a:extLst xmlns:a="http://schemas.openxmlformats.org/drawingml/2006/main">
               <a:ext uri="{FF2B5EF4-FFF2-40B4-BE49-F238E27FC236}">
-                <a16:creationId xmlns:a16="http://schemas.microsoft.com/office/drawing/2014/main" id="{4F89C720-223F-4642-9D61-BF5553DA97E6}"/>
+                <a16:creationId xmlns:a16="http://schemas.microsoft.com/office/drawing/2014/main" id="{33FC9CCA-47AD-42B6-8B99-81BECC7CBD58}"/>
               </a:ext>
             </a:extLst>
           </p:cNvPr>
@@ -7353,10 +7542,10 @@
       </p:sp>
       <p:sp>
         <p:nvSpPr>
-          <p:cNvPr id="2" name="text-52">
+          <p:cNvPr id="2" name="text-55">
             <a:extLst xmlns:a="http://schemas.openxmlformats.org/drawingml/2006/main">
               <a:ext uri="{FF2B5EF4-FFF2-40B4-BE49-F238E27FC236}">
-                <a16:creationId xmlns:a16="http://schemas.microsoft.com/office/drawing/2014/main" id="{7D9F2B74-5397-4B77-8ADB-7D7A02F8B712}"/>
+                <a16:creationId xmlns:a16="http://schemas.microsoft.com/office/drawing/2014/main" id="{EAECAA3B-1E99-4C35-9968-445579033810}"/>
               </a:ext>
             </a:extLst>
           </p:cNvPr>
@@ -7413,7 +7602,7 @@
           <p:cNvPr id="3" name="">
             <a:extLst xmlns:a="http://schemas.openxmlformats.org/drawingml/2006/main">
               <a:ext uri="{FF2B5EF4-FFF2-40B4-BE49-F238E27FC236}">
-                <a16:creationId xmlns:a16="http://schemas.microsoft.com/office/drawing/2014/main" id="{C87438E7-7B99-417B-9384-EF41B20FF0A4}"/>
+                <a16:creationId xmlns:a16="http://schemas.microsoft.com/office/drawing/2014/main" id="{CF6E556E-1CE9-408F-A1E0-5513E07B0D1B}"/>
               </a:ext>
             </a:extLst>
           </p:cNvPr>
@@ -7440,10 +7629,10 @@
       </p:sp>
       <p:sp>
         <p:nvSpPr>
-          <p:cNvPr id="4" name="text-53">
+          <p:cNvPr id="4" name="text-56">
             <a:extLst xmlns:a="http://schemas.openxmlformats.org/drawingml/2006/main">
               <a:ext uri="{FF2B5EF4-FFF2-40B4-BE49-F238E27FC236}">
-                <a16:creationId xmlns:a16="http://schemas.microsoft.com/office/drawing/2014/main" id="{ABF1C3EA-EC6A-4245-9B1A-AEF495508392}"/>
+                <a16:creationId xmlns:a16="http://schemas.microsoft.com/office/drawing/2014/main" id="{5B0EA030-F329-4903-BC52-2CD5CAF16750}"/>
               </a:ext>
             </a:extLst>
           </p:cNvPr>
@@ -7497,10 +7686,10 @@
       </p:sp>
       <p:sp>
         <p:nvSpPr>
-          <p:cNvPr id="5" name="text-54">
+          <p:cNvPr id="5" name="text-57">
             <a:extLst xmlns:a="http://schemas.openxmlformats.org/drawingml/2006/main">
               <a:ext uri="{FF2B5EF4-FFF2-40B4-BE49-F238E27FC236}">
-                <a16:creationId xmlns:a16="http://schemas.microsoft.com/office/drawing/2014/main" id="{238C69D9-02CB-4D08-B99F-8CD6DC89D854}"/>
+                <a16:creationId xmlns:a16="http://schemas.microsoft.com/office/drawing/2014/main" id="{610F3920-8B45-450C-9DE7-5305AFC971C2}"/>
               </a:ext>
             </a:extLst>
           </p:cNvPr>
@@ -7557,7 +7746,7 @@
           <p:cNvPr id="6" name="">
             <a:extLst xmlns:a="http://schemas.openxmlformats.org/drawingml/2006/main">
               <a:ext uri="{FF2B5EF4-FFF2-40B4-BE49-F238E27FC236}">
-                <a16:creationId xmlns:a16="http://schemas.microsoft.com/office/drawing/2014/main" id="{BB1C7ED2-68EB-4A43-9A19-69026A011838}"/>
+                <a16:creationId xmlns:a16="http://schemas.microsoft.com/office/drawing/2014/main" id="{8479DCE5-6CDC-436E-A6F9-1AE29E56F2E5}"/>
               </a:ext>
             </a:extLst>
           </p:cNvPr>
@@ -7584,10 +7773,10 @@
       </p:sp>
       <p:sp>
         <p:nvSpPr>
-          <p:cNvPr id="7" name="text-55">
+          <p:cNvPr id="7" name="text-58">
             <a:extLst xmlns:a="http://schemas.openxmlformats.org/drawingml/2006/main">
               <a:ext uri="{FF2B5EF4-FFF2-40B4-BE49-F238E27FC236}">
-                <a16:creationId xmlns:a16="http://schemas.microsoft.com/office/drawing/2014/main" id="{8D99C85E-032B-4EDB-A22D-3C1768ADC1A5}"/>
+                <a16:creationId xmlns:a16="http://schemas.microsoft.com/office/drawing/2014/main" id="{805CB344-05BC-4063-9F17-04970C4F6C16}"/>
               </a:ext>
             </a:extLst>
           </p:cNvPr>
@@ -7641,10 +7830,10 @@
       </p:sp>
       <p:sp>
         <p:nvSpPr>
-          <p:cNvPr id="8" name="text-56">
+          <p:cNvPr id="8" name="text-59">
             <a:extLst xmlns:a="http://schemas.openxmlformats.org/drawingml/2006/main">
               <a:ext uri="{FF2B5EF4-FFF2-40B4-BE49-F238E27FC236}">
-                <a16:creationId xmlns:a16="http://schemas.microsoft.com/office/drawing/2014/main" id="{AA906953-768A-4A1D-B8D4-43FACBC51430}"/>
+                <a16:creationId xmlns:a16="http://schemas.microsoft.com/office/drawing/2014/main" id="{4E1A7423-1C93-4FD7-B3D9-FCE82BCCCEAF}"/>
               </a:ext>
             </a:extLst>
           </p:cNvPr>
@@ -7698,10 +7887,10 @@
       </p:sp>
       <p:sp>
         <p:nvSpPr>
-          <p:cNvPr id="9" name="text-57">
+          <p:cNvPr id="9" name="text-60">
             <a:extLst xmlns:a="http://schemas.openxmlformats.org/drawingml/2006/main">
               <a:ext uri="{FF2B5EF4-FFF2-40B4-BE49-F238E27FC236}">
-                <a16:creationId xmlns:a16="http://schemas.microsoft.com/office/drawing/2014/main" id="{A76ADC36-8F99-4595-92C9-0F7687AD5439}"/>
+                <a16:creationId xmlns:a16="http://schemas.microsoft.com/office/drawing/2014/main" id="{A71E4D47-A684-4855-B1EA-4259D465EF64}"/>
               </a:ext>
             </a:extLst>
           </p:cNvPr>
@@ -7824,10 +8013,10 @@
       </p:sp>
       <p:sp>
         <p:nvSpPr>
-          <p:cNvPr id="10" name="text-58">
+          <p:cNvPr id="10" name="text-61">
             <a:extLst xmlns:a="http://schemas.openxmlformats.org/drawingml/2006/main">
               <a:ext uri="{FF2B5EF4-FFF2-40B4-BE49-F238E27FC236}">
-                <a16:creationId xmlns:a16="http://schemas.microsoft.com/office/drawing/2014/main" id="{8875DA19-AA16-4EC2-9F0A-692B51DE66CF}"/>
+                <a16:creationId xmlns:a16="http://schemas.microsoft.com/office/drawing/2014/main" id="{464624CC-E910-4608-BBA4-62550D60EA88}"/>
               </a:ext>
             </a:extLst>
           </p:cNvPr>
@@ -7953,7 +8142,7 @@
           <p:cNvPr id="11" name="">
             <a:extLst xmlns:a="http://schemas.openxmlformats.org/drawingml/2006/main">
               <a:ext uri="{FF2B5EF4-FFF2-40B4-BE49-F238E27FC236}">
-                <a16:creationId xmlns:a16="http://schemas.microsoft.com/office/drawing/2014/main" id="{D5447E67-E12A-4812-B3C0-584F0C4E4F12}"/>
+                <a16:creationId xmlns:a16="http://schemas.microsoft.com/office/drawing/2014/main" id="{550F99F6-D181-46FE-BFAC-7014C1A9E4D1}"/>
               </a:ext>
             </a:extLst>
           </p:cNvPr>
@@ -7980,10 +8169,10 @@
       </p:sp>
       <p:sp>
         <p:nvSpPr>
-          <p:cNvPr id="12" name="text-59">
+          <p:cNvPr id="12" name="text-62">
             <a:extLst xmlns:a="http://schemas.openxmlformats.org/drawingml/2006/main">
               <a:ext uri="{FF2B5EF4-FFF2-40B4-BE49-F238E27FC236}">
-                <a16:creationId xmlns:a16="http://schemas.microsoft.com/office/drawing/2014/main" id="{7FCC7861-471F-41F5-A36F-55A9BD329F16}"/>
+                <a16:creationId xmlns:a16="http://schemas.microsoft.com/office/drawing/2014/main" id="{92FDD7C4-C299-421A-B578-CE7BBA348807}"/>
               </a:ext>
             </a:extLst>
           </p:cNvPr>
@@ -8037,10 +8226,10 @@
       </p:sp>
       <p:sp>
         <p:nvSpPr>
-          <p:cNvPr id="13" name="text-60">
+          <p:cNvPr id="13" name="text-63">
             <a:extLst xmlns:a="http://schemas.openxmlformats.org/drawingml/2006/main">
               <a:ext uri="{FF2B5EF4-FFF2-40B4-BE49-F238E27FC236}">
-                <a16:creationId xmlns:a16="http://schemas.microsoft.com/office/drawing/2014/main" id="{65D2AD1E-9626-4DAA-B82E-3DE7A80C8518}"/>
+                <a16:creationId xmlns:a16="http://schemas.microsoft.com/office/drawing/2014/main" id="{B32A79B4-7BBE-4259-85FC-80096A9DD365}"/>
               </a:ext>
             </a:extLst>
           </p:cNvPr>
@@ -8118,7 +8307,7 @@
     </p:spTree>
     <p:extLst>
       <p:ext uri="{BB962C8B-B14F-4D97-AF65-F5344CB8AC3E}">
-        <p14:creationId xmlns:p14="http://schemas.microsoft.com/office/powerpoint/2010/main" val="1280557009"/>
+        <p14:creationId xmlns:p14="http://schemas.microsoft.com/office/powerpoint/2010/main" val="2050569217"/>
       </p:ext>
     </p:extLst>
   </p:cSld>
@@ -8146,10 +8335,10 @@
       </p:grpSpPr>
       <p:sp>
         <p:nvSpPr>
-          <p:cNvPr id="10" name="text-61">
+          <p:cNvPr id="10" name="text-64">
             <a:extLst xmlns:a="http://schemas.openxmlformats.org/drawingml/2006/main">
               <a:ext uri="{FF2B5EF4-FFF2-40B4-BE49-F238E27FC236}">
-                <a16:creationId xmlns:a16="http://schemas.microsoft.com/office/drawing/2014/main" id="{D48A1FB8-2AFE-4290-ACCE-57797860D600}"/>
+                <a16:creationId xmlns:a16="http://schemas.microsoft.com/office/drawing/2014/main" id="{3B88CFD3-21F3-4EEE-9F95-D24998A996D3}"/>
               </a:ext>
             </a:extLst>
           </p:cNvPr>
@@ -8203,10 +8392,10 @@
       </p:sp>
       <p:sp>
         <p:nvSpPr>
-          <p:cNvPr id="2" name="text-62">
+          <p:cNvPr id="2" name="text-65">
             <a:extLst xmlns:a="http://schemas.openxmlformats.org/drawingml/2006/main">
               <a:ext uri="{FF2B5EF4-FFF2-40B4-BE49-F238E27FC236}">
-                <a16:creationId xmlns:a16="http://schemas.microsoft.com/office/drawing/2014/main" id="{AD176BB0-727C-4B4F-9BD9-7B718A7BEC8D}"/>
+                <a16:creationId xmlns:a16="http://schemas.microsoft.com/office/drawing/2014/main" id="{AEB381A4-B271-4B49-B402-3D3B3A500067}"/>
               </a:ext>
             </a:extLst>
           </p:cNvPr>
@@ -8263,7 +8452,7 @@
           <p:cNvPr id="3" name="">
             <a:extLst xmlns:a="http://schemas.openxmlformats.org/drawingml/2006/main">
               <a:ext uri="{FF2B5EF4-FFF2-40B4-BE49-F238E27FC236}">
-                <a16:creationId xmlns:a16="http://schemas.microsoft.com/office/drawing/2014/main" id="{D73B496A-BDAC-45EC-A0DA-280254160C13}"/>
+                <a16:creationId xmlns:a16="http://schemas.microsoft.com/office/drawing/2014/main" id="{95DB700C-6191-4603-8D50-9E98BB767EB9}"/>
               </a:ext>
             </a:extLst>
           </p:cNvPr>
@@ -8290,10 +8479,10 @@
       </p:sp>
       <p:sp>
         <p:nvSpPr>
-          <p:cNvPr id="4" name="text-63">
+          <p:cNvPr id="4" name="text-66">
             <a:extLst xmlns:a="http://schemas.openxmlformats.org/drawingml/2006/main">
               <a:ext uri="{FF2B5EF4-FFF2-40B4-BE49-F238E27FC236}">
-                <a16:creationId xmlns:a16="http://schemas.microsoft.com/office/drawing/2014/main" id="{6693D1C8-422C-45E6-B3D7-7150F9FAE192}"/>
+                <a16:creationId xmlns:a16="http://schemas.microsoft.com/office/drawing/2014/main" id="{2C358845-B7DB-4B4F-B484-3CCC42F90258}"/>
               </a:ext>
             </a:extLst>
           </p:cNvPr>
@@ -8347,10 +8536,10 @@
       </p:sp>
       <p:sp>
         <p:nvSpPr>
-          <p:cNvPr id="5" name="text-64">
+          <p:cNvPr id="5" name="text-67">
             <a:extLst xmlns:a="http://schemas.openxmlformats.org/drawingml/2006/main">
               <a:ext uri="{FF2B5EF4-FFF2-40B4-BE49-F238E27FC236}">
-                <a16:creationId xmlns:a16="http://schemas.microsoft.com/office/drawing/2014/main" id="{DC9C2F3D-D0F8-456C-A085-1F2C3ABCC886}"/>
+                <a16:creationId xmlns:a16="http://schemas.microsoft.com/office/drawing/2014/main" id="{84653DA2-45B3-44A5-9547-BD875CE33161}"/>
               </a:ext>
             </a:extLst>
           </p:cNvPr>
@@ -8747,10 +8936,10 @@
       </p:graphicFrame>
       <p:sp>
         <p:nvSpPr>
-          <p:cNvPr id="7" name="text-65">
+          <p:cNvPr id="7" name="text-68">
             <a:extLst xmlns:a="http://schemas.openxmlformats.org/drawingml/2006/main">
               <a:ext uri="{FF2B5EF4-FFF2-40B4-BE49-F238E27FC236}">
-                <a16:creationId xmlns:a16="http://schemas.microsoft.com/office/drawing/2014/main" id="{1E1C49F2-6814-4ED1-986D-6AB21F406A6F}"/>
+                <a16:creationId xmlns:a16="http://schemas.microsoft.com/office/drawing/2014/main" id="{717F2991-23E6-476D-813C-29B645698405}"/>
               </a:ext>
             </a:extLst>
           </p:cNvPr>
@@ -8804,10 +8993,10 @@
       </p:sp>
       <p:sp>
         <p:nvSpPr>
-          <p:cNvPr id="8" name="text-66">
+          <p:cNvPr id="8" name="text-69">
             <a:extLst xmlns:a="http://schemas.openxmlformats.org/drawingml/2006/main">
               <a:ext uri="{FF2B5EF4-FFF2-40B4-BE49-F238E27FC236}">
-                <a16:creationId xmlns:a16="http://schemas.microsoft.com/office/drawing/2014/main" id="{9073D752-EE4C-4116-9FB0-6118BDAC9AD5}"/>
+                <a16:creationId xmlns:a16="http://schemas.microsoft.com/office/drawing/2014/main" id="{E8500B33-4D33-4715-9AC1-548A5A4B0C76}"/>
               </a:ext>
             </a:extLst>
           </p:cNvPr>
@@ -8861,10 +9050,10 @@
       </p:sp>
       <p:sp>
         <p:nvSpPr>
-          <p:cNvPr id="9" name="text-67">
+          <p:cNvPr id="9" name="text-70">
             <a:extLst xmlns:a="http://schemas.openxmlformats.org/drawingml/2006/main">
               <a:ext uri="{FF2B5EF4-FFF2-40B4-BE49-F238E27FC236}">
-                <a16:creationId xmlns:a16="http://schemas.microsoft.com/office/drawing/2014/main" id="{F1F5F033-F427-47AA-A674-E8DE23EFAECF}"/>
+                <a16:creationId xmlns:a16="http://schemas.microsoft.com/office/drawing/2014/main" id="{7F500CBD-01A0-44D6-8B1E-21AD6AFEFC96}"/>
               </a:ext>
             </a:extLst>
           </p:cNvPr>
@@ -8919,7 +9108,7 @@
     </p:spTree>
     <p:extLst>
       <p:ext uri="{BB962C8B-B14F-4D97-AF65-F5344CB8AC3E}">
-        <p14:creationId xmlns:p14="http://schemas.microsoft.com/office/powerpoint/2010/main" val="563326393"/>
+        <p14:creationId xmlns:p14="http://schemas.microsoft.com/office/powerpoint/2010/main" val="1116949144"/>
       </p:ext>
     </p:extLst>
   </p:cSld>
@@ -8947,10 +9136,10 @@
       </p:grpSpPr>
       <p:sp>
         <p:nvSpPr>
-          <p:cNvPr id="10" name="text-68">
+          <p:cNvPr id="10" name="text-71">
             <a:extLst xmlns:a="http://schemas.openxmlformats.org/drawingml/2006/main">
               <a:ext uri="{FF2B5EF4-FFF2-40B4-BE49-F238E27FC236}">
-                <a16:creationId xmlns:a16="http://schemas.microsoft.com/office/drawing/2014/main" id="{446DD717-5438-43D3-A583-3E6520FC0BD5}"/>
+                <a16:creationId xmlns:a16="http://schemas.microsoft.com/office/drawing/2014/main" id="{FA44FDA3-6E59-49F8-B96E-86CA9EF6A714}"/>
               </a:ext>
             </a:extLst>
           </p:cNvPr>
@@ -9004,10 +9193,10 @@
       </p:sp>
       <p:sp>
         <p:nvSpPr>
-          <p:cNvPr id="2" name="text-69">
+          <p:cNvPr id="2" name="text-72">
             <a:extLst xmlns:a="http://schemas.openxmlformats.org/drawingml/2006/main">
               <a:ext uri="{FF2B5EF4-FFF2-40B4-BE49-F238E27FC236}">
-                <a16:creationId xmlns:a16="http://schemas.microsoft.com/office/drawing/2014/main" id="{FD717DD2-6798-483F-AB9F-3B7CF35540EF}"/>
+                <a16:creationId xmlns:a16="http://schemas.microsoft.com/office/drawing/2014/main" id="{811BE293-3591-496A-BBED-8B6663F8F9C4}"/>
               </a:ext>
             </a:extLst>
           </p:cNvPr>
@@ -9064,7 +9253,7 @@
           <p:cNvPr id="3" name="">
             <a:extLst xmlns:a="http://schemas.openxmlformats.org/drawingml/2006/main">
               <a:ext uri="{FF2B5EF4-FFF2-40B4-BE49-F238E27FC236}">
-                <a16:creationId xmlns:a16="http://schemas.microsoft.com/office/drawing/2014/main" id="{6CCDCC7E-9C12-49F8-8C5E-170A8BA9E8FD}"/>
+                <a16:creationId xmlns:a16="http://schemas.microsoft.com/office/drawing/2014/main" id="{ADA4BC1F-E4FD-423B-A5B3-645D17C76611}"/>
               </a:ext>
             </a:extLst>
           </p:cNvPr>
@@ -9091,10 +9280,10 @@
       </p:sp>
       <p:sp>
         <p:nvSpPr>
-          <p:cNvPr id="4" name="text-70">
+          <p:cNvPr id="4" name="text-73">
             <a:extLst xmlns:a="http://schemas.openxmlformats.org/drawingml/2006/main">
               <a:ext uri="{FF2B5EF4-FFF2-40B4-BE49-F238E27FC236}">
-                <a16:creationId xmlns:a16="http://schemas.microsoft.com/office/drawing/2014/main" id="{3BDD2F1C-7169-481D-B9B2-2EBCA9F4D78C}"/>
+                <a16:creationId xmlns:a16="http://schemas.microsoft.com/office/drawing/2014/main" id="{92DBDBA7-4C7C-4D9E-BDB5-27872FB54774}"/>
               </a:ext>
             </a:extLst>
           </p:cNvPr>
@@ -9148,10 +9337,10 @@
       </p:sp>
       <p:sp>
         <p:nvSpPr>
-          <p:cNvPr id="5" name="text-71">
+          <p:cNvPr id="5" name="text-74">
             <a:extLst xmlns:a="http://schemas.openxmlformats.org/drawingml/2006/main">
               <a:ext uri="{FF2B5EF4-FFF2-40B4-BE49-F238E27FC236}">
-                <a16:creationId xmlns:a16="http://schemas.microsoft.com/office/drawing/2014/main" id="{D90BEED2-DE5F-4F76-B2D8-E9E24AC678A3}"/>
+                <a16:creationId xmlns:a16="http://schemas.microsoft.com/office/drawing/2014/main" id="{AAD6CE96-3F45-4341-AA9A-FC1527F14C86}"/>
               </a:ext>
             </a:extLst>
           </p:cNvPr>
@@ -9497,10 +9686,10 @@
       </p:graphicFrame>
       <p:sp>
         <p:nvSpPr>
-          <p:cNvPr id="7" name="text-72">
+          <p:cNvPr id="7" name="text-75">
             <a:extLst xmlns:a="http://schemas.openxmlformats.org/drawingml/2006/main">
               <a:ext uri="{FF2B5EF4-FFF2-40B4-BE49-F238E27FC236}">
-                <a16:creationId xmlns:a16="http://schemas.microsoft.com/office/drawing/2014/main" id="{328B0225-DFFD-4F76-95C6-F97DBCF6BCE4}"/>
+                <a16:creationId xmlns:a16="http://schemas.microsoft.com/office/drawing/2014/main" id="{33329F97-5C69-45A7-A131-9BA003EBB4B7}"/>
               </a:ext>
             </a:extLst>
           </p:cNvPr>
@@ -9554,10 +9743,10 @@
       </p:sp>
       <p:sp>
         <p:nvSpPr>
-          <p:cNvPr id="8" name="text-73">
+          <p:cNvPr id="8" name="text-76">
             <a:extLst xmlns:a="http://schemas.openxmlformats.org/drawingml/2006/main">
               <a:ext uri="{FF2B5EF4-FFF2-40B4-BE49-F238E27FC236}">
-                <a16:creationId xmlns:a16="http://schemas.microsoft.com/office/drawing/2014/main" id="{1B5EAC3B-9F42-4C79-B64E-3D58280B3E3B}"/>
+                <a16:creationId xmlns:a16="http://schemas.microsoft.com/office/drawing/2014/main" id="{4F7EEBB6-504D-4F37-B531-A89F6834AE86}"/>
               </a:ext>
             </a:extLst>
           </p:cNvPr>
@@ -9611,10 +9800,10 @@
       </p:sp>
       <p:sp>
         <p:nvSpPr>
-          <p:cNvPr id="9" name="text-74">
+          <p:cNvPr id="9" name="text-77">
             <a:extLst xmlns:a="http://schemas.openxmlformats.org/drawingml/2006/main">
               <a:ext uri="{FF2B5EF4-FFF2-40B4-BE49-F238E27FC236}">
-                <a16:creationId xmlns:a16="http://schemas.microsoft.com/office/drawing/2014/main" id="{6902AECB-391F-465E-9334-2F2E0CEE997D}"/>
+                <a16:creationId xmlns:a16="http://schemas.microsoft.com/office/drawing/2014/main" id="{0A5FABDC-C454-4B56-B24D-50A2C1F8562A}"/>
               </a:ext>
             </a:extLst>
           </p:cNvPr>
@@ -9669,7 +9858,7 @@
     </p:spTree>
     <p:extLst>
       <p:ext uri="{BB962C8B-B14F-4D97-AF65-F5344CB8AC3E}">
-        <p14:creationId xmlns:p14="http://schemas.microsoft.com/office/powerpoint/2010/main" val="2009366579"/>
+        <p14:creationId xmlns:p14="http://schemas.microsoft.com/office/powerpoint/2010/main" val="1675159222"/>
       </p:ext>
     </p:extLst>
   </p:cSld>
